--- a/RVfpga/RVfpgaEL2/RVfpga_NexysVideo-NoDDR/Documents/Figures_GSG/VeeRwolfCore_RVfpga.pptx
+++ b/RVfpga/RVfpgaEL2/RVfpga_NexysVideo-NoDDR/Documents/Figures_GSG/VeeRwolfCore_RVfpga.pptx
@@ -242,7 +242,7 @@
           <a:p>
             <a:fld id="{DAF9A6B8-170E-429A-B103-676E1ECC4DF0}" type="datetimeFigureOut">
               <a:rPr lang="es-ES" smtClean="0"/>
-              <a:t>17/08/2023</a:t>
+              <a:t>12/10/2025</a:t>
             </a:fld>
             <a:endParaRPr lang="es-ES"/>
           </a:p>
@@ -410,7 +410,7 @@
           <a:p>
             <a:fld id="{DAF9A6B8-170E-429A-B103-676E1ECC4DF0}" type="datetimeFigureOut">
               <a:rPr lang="es-ES" smtClean="0"/>
-              <a:t>17/08/2023</a:t>
+              <a:t>12/10/2025</a:t>
             </a:fld>
             <a:endParaRPr lang="es-ES"/>
           </a:p>
@@ -588,7 +588,7 @@
           <a:p>
             <a:fld id="{DAF9A6B8-170E-429A-B103-676E1ECC4DF0}" type="datetimeFigureOut">
               <a:rPr lang="es-ES" smtClean="0"/>
-              <a:t>17/08/2023</a:t>
+              <a:t>12/10/2025</a:t>
             </a:fld>
             <a:endParaRPr lang="es-ES"/>
           </a:p>
@@ -756,7 +756,7 @@
           <a:p>
             <a:fld id="{DAF9A6B8-170E-429A-B103-676E1ECC4DF0}" type="datetimeFigureOut">
               <a:rPr lang="es-ES" smtClean="0"/>
-              <a:t>17/08/2023</a:t>
+              <a:t>12/10/2025</a:t>
             </a:fld>
             <a:endParaRPr lang="es-ES"/>
           </a:p>
@@ -1001,7 +1001,7 @@
           <a:p>
             <a:fld id="{DAF9A6B8-170E-429A-B103-676E1ECC4DF0}" type="datetimeFigureOut">
               <a:rPr lang="es-ES" smtClean="0"/>
-              <a:t>17/08/2023</a:t>
+              <a:t>12/10/2025</a:t>
             </a:fld>
             <a:endParaRPr lang="es-ES"/>
           </a:p>
@@ -1230,7 +1230,7 @@
           <a:p>
             <a:fld id="{DAF9A6B8-170E-429A-B103-676E1ECC4DF0}" type="datetimeFigureOut">
               <a:rPr lang="es-ES" smtClean="0"/>
-              <a:t>17/08/2023</a:t>
+              <a:t>12/10/2025</a:t>
             </a:fld>
             <a:endParaRPr lang="es-ES"/>
           </a:p>
@@ -1594,7 +1594,7 @@
           <a:p>
             <a:fld id="{DAF9A6B8-170E-429A-B103-676E1ECC4DF0}" type="datetimeFigureOut">
               <a:rPr lang="es-ES" smtClean="0"/>
-              <a:t>17/08/2023</a:t>
+              <a:t>12/10/2025</a:t>
             </a:fld>
             <a:endParaRPr lang="es-ES"/>
           </a:p>
@@ -1711,7 +1711,7 @@
           <a:p>
             <a:fld id="{DAF9A6B8-170E-429A-B103-676E1ECC4DF0}" type="datetimeFigureOut">
               <a:rPr lang="es-ES" smtClean="0"/>
-              <a:t>17/08/2023</a:t>
+              <a:t>12/10/2025</a:t>
             </a:fld>
             <a:endParaRPr lang="es-ES"/>
           </a:p>
@@ -1806,7 +1806,7 @@
           <a:p>
             <a:fld id="{DAF9A6B8-170E-429A-B103-676E1ECC4DF0}" type="datetimeFigureOut">
               <a:rPr lang="es-ES" smtClean="0"/>
-              <a:t>17/08/2023</a:t>
+              <a:t>12/10/2025</a:t>
             </a:fld>
             <a:endParaRPr lang="es-ES"/>
           </a:p>
@@ -2081,7 +2081,7 @@
           <a:p>
             <a:fld id="{DAF9A6B8-170E-429A-B103-676E1ECC4DF0}" type="datetimeFigureOut">
               <a:rPr lang="es-ES" smtClean="0"/>
-              <a:t>17/08/2023</a:t>
+              <a:t>12/10/2025</a:t>
             </a:fld>
             <a:endParaRPr lang="es-ES"/>
           </a:p>
@@ -2333,7 +2333,7 @@
           <a:p>
             <a:fld id="{DAF9A6B8-170E-429A-B103-676E1ECC4DF0}" type="datetimeFigureOut">
               <a:rPr lang="es-ES" smtClean="0"/>
-              <a:t>17/08/2023</a:t>
+              <a:t>12/10/2025</a:t>
             </a:fld>
             <a:endParaRPr lang="es-ES"/>
           </a:p>
@@ -2544,7 +2544,7 @@
           <a:p>
             <a:fld id="{DAF9A6B8-170E-429A-B103-676E1ECC4DF0}" type="datetimeFigureOut">
               <a:rPr lang="es-ES" smtClean="0"/>
-              <a:t>17/08/2023</a:t>
+              <a:t>12/10/2025</a:t>
             </a:fld>
             <a:endParaRPr lang="es-ES"/>
           </a:p>
@@ -3990,10 +3990,10 @@
       </p:grpSpPr>
       <p:grpSp>
         <p:nvGrpSpPr>
-          <p:cNvPr id="24" name="Group 23">
+          <p:cNvPr id="27" name="组合 26">
             <a:extLst>
               <a:ext uri="{FF2B5EF4-FFF2-40B4-BE49-F238E27FC236}">
-                <a16:creationId xmlns:a16="http://schemas.microsoft.com/office/drawing/2014/main" id="{1BAD1284-26ED-E070-A457-E26860567491}"/>
+                <a16:creationId xmlns:a16="http://schemas.microsoft.com/office/drawing/2014/main" id="{C47E1C75-4645-8E4F-52E0-3F593C669017}"/>
               </a:ext>
             </a:extLst>
           </p:cNvPr>
@@ -4008,1169 +4008,1227 @@
             <a:chExt cx="8936227" cy="6384584"/>
           </a:xfrm>
         </p:grpSpPr>
-        <p:sp>
-          <p:nvSpPr>
-            <p:cNvPr id="5" name="Rectángulo redondeado 4"/>
-            <p:cNvSpPr/>
-            <p:nvPr/>
-          </p:nvSpPr>
-          <p:spPr>
-            <a:xfrm>
-              <a:off x="3094191" y="3424381"/>
-              <a:ext cx="2058789" cy="238347"/>
-            </a:xfrm>
-            <a:prstGeom prst="roundRect">
-              <a:avLst/>
-            </a:prstGeom>
-            <a:solidFill>
-              <a:srgbClr val="FFFF99"/>
-            </a:solidFill>
-          </p:spPr>
-          <p:style>
-            <a:lnRef idx="2">
-              <a:schemeClr val="accent1">
-                <a:shade val="50000"/>
-              </a:schemeClr>
-            </a:lnRef>
-            <a:fillRef idx="1">
-              <a:schemeClr val="accent1"/>
-            </a:fillRef>
-            <a:effectRef idx="0">
-              <a:schemeClr val="accent1"/>
-            </a:effectRef>
-            <a:fontRef idx="minor">
-              <a:schemeClr val="lt1"/>
-            </a:fontRef>
-          </p:style>
-          <p:txBody>
-            <a:bodyPr rtlCol="0" anchor="ctr"/>
-            <a:lstStyle/>
-            <a:p>
-              <a:pPr algn="ctr"/>
-              <a:r>
-                <a:rPr lang="es-ES" sz="1400" dirty="0">
-                  <a:solidFill>
-                    <a:schemeClr val="tx1"/>
-                  </a:solidFill>
-                </a:rPr>
-                <a:t>AXI </a:t>
-              </a:r>
-              <a:r>
-                <a:rPr lang="es-ES" sz="1400" dirty="0" err="1">
-                  <a:solidFill>
-                    <a:schemeClr val="tx1"/>
-                  </a:solidFill>
-                </a:rPr>
-                <a:t>Interconnect</a:t>
-              </a:r>
-              <a:endParaRPr lang="es-ES" sz="1400" dirty="0">
-                <a:solidFill>
-                  <a:schemeClr val="tx1"/>
-                </a:solidFill>
-              </a:endParaRPr>
-            </a:p>
-          </p:txBody>
-        </p:sp>
-        <p:sp>
-          <p:nvSpPr>
-            <p:cNvPr id="6" name="Rectángulo redondeado 5"/>
-            <p:cNvSpPr/>
-            <p:nvPr/>
-          </p:nvSpPr>
-          <p:spPr>
-            <a:xfrm>
-              <a:off x="3094191" y="3954910"/>
-              <a:ext cx="2058789" cy="238347"/>
-            </a:xfrm>
-            <a:prstGeom prst="roundRect">
-              <a:avLst/>
-            </a:prstGeom>
-            <a:solidFill>
-              <a:srgbClr val="FFFF99"/>
-            </a:solidFill>
-          </p:spPr>
-          <p:style>
-            <a:lnRef idx="2">
-              <a:schemeClr val="accent1">
-                <a:shade val="50000"/>
-              </a:schemeClr>
-            </a:lnRef>
-            <a:fillRef idx="1">
-              <a:schemeClr val="accent1"/>
-            </a:fillRef>
-            <a:effectRef idx="0">
-              <a:schemeClr val="accent1"/>
-            </a:effectRef>
-            <a:fontRef idx="minor">
-              <a:schemeClr val="lt1"/>
-            </a:fontRef>
-          </p:style>
-          <p:txBody>
-            <a:bodyPr rtlCol="0" anchor="ctr"/>
-            <a:lstStyle/>
-            <a:p>
-              <a:pPr algn="ctr"/>
-              <a:r>
-                <a:rPr lang="es-ES" sz="1400" dirty="0">
-                  <a:solidFill>
-                    <a:schemeClr val="tx1"/>
-                  </a:solidFill>
-                </a:rPr>
-                <a:t>AXI-</a:t>
-              </a:r>
-              <a:r>
-                <a:rPr lang="es-ES" sz="1400" dirty="0" err="1">
-                  <a:solidFill>
-                    <a:schemeClr val="tx1"/>
-                  </a:solidFill>
-                </a:rPr>
-                <a:t>Wishbone</a:t>
-              </a:r>
-              <a:r>
-                <a:rPr lang="es-ES" sz="1400" dirty="0">
-                  <a:solidFill>
-                    <a:schemeClr val="tx1"/>
-                  </a:solidFill>
-                </a:rPr>
-                <a:t> Bridge</a:t>
-              </a:r>
-            </a:p>
-          </p:txBody>
-        </p:sp>
-        <p:sp>
-          <p:nvSpPr>
-            <p:cNvPr id="8" name="Flecha arriba y abajo 7"/>
-            <p:cNvSpPr/>
-            <p:nvPr/>
-          </p:nvSpPr>
-          <p:spPr>
-            <a:xfrm>
-              <a:off x="4043307" y="3662225"/>
-              <a:ext cx="160555" cy="293188"/>
-            </a:xfrm>
-            <a:prstGeom prst="upDownArrow">
-              <a:avLst/>
-            </a:prstGeom>
-            <a:solidFill>
-              <a:schemeClr val="accent4">
-                <a:lumMod val="60000"/>
-                <a:lumOff val="40000"/>
-              </a:schemeClr>
-            </a:solidFill>
-          </p:spPr>
-          <p:style>
-            <a:lnRef idx="2">
-              <a:schemeClr val="accent1">
-                <a:shade val="50000"/>
-              </a:schemeClr>
-            </a:lnRef>
-            <a:fillRef idx="1">
-              <a:schemeClr val="accent1"/>
-            </a:fillRef>
-            <a:effectRef idx="0">
-              <a:schemeClr val="accent1"/>
-            </a:effectRef>
-            <a:fontRef idx="minor">
-              <a:schemeClr val="lt1"/>
-            </a:fontRef>
-          </p:style>
-          <p:txBody>
-            <a:bodyPr rtlCol="0" anchor="ctr"/>
-            <a:lstStyle/>
-            <a:p>
-              <a:pPr algn="ctr"/>
-              <a:endParaRPr lang="es-ES"/>
-            </a:p>
-          </p:txBody>
-        </p:sp>
-        <p:sp>
-          <p:nvSpPr>
-            <p:cNvPr id="9" name="Rectángulo redondeado 8"/>
-            <p:cNvSpPr/>
-            <p:nvPr/>
-          </p:nvSpPr>
-          <p:spPr>
-            <a:xfrm>
-              <a:off x="3094191" y="4485943"/>
-              <a:ext cx="2058789" cy="238347"/>
-            </a:xfrm>
-            <a:prstGeom prst="roundRect">
-              <a:avLst/>
-            </a:prstGeom>
-            <a:solidFill>
-              <a:srgbClr val="FFFF99"/>
-            </a:solidFill>
-          </p:spPr>
-          <p:style>
-            <a:lnRef idx="2">
-              <a:schemeClr val="accent1">
-                <a:shade val="50000"/>
-              </a:schemeClr>
-            </a:lnRef>
-            <a:fillRef idx="1">
-              <a:schemeClr val="accent1"/>
-            </a:fillRef>
-            <a:effectRef idx="0">
-              <a:schemeClr val="accent1"/>
-            </a:effectRef>
-            <a:fontRef idx="minor">
-              <a:schemeClr val="lt1"/>
-            </a:fontRef>
-          </p:style>
-          <p:txBody>
-            <a:bodyPr rtlCol="0" anchor="ctr"/>
-            <a:lstStyle/>
-            <a:p>
-              <a:pPr algn="ctr"/>
-              <a:r>
-                <a:rPr lang="es-ES" sz="1400" dirty="0" err="1">
-                  <a:solidFill>
-                    <a:schemeClr val="tx1"/>
-                  </a:solidFill>
-                </a:rPr>
-                <a:t>Wishbone</a:t>
-              </a:r>
-              <a:r>
-                <a:rPr lang="es-ES" sz="1400" dirty="0">
-                  <a:solidFill>
-                    <a:schemeClr val="tx1"/>
-                  </a:solidFill>
-                </a:rPr>
-                <a:t> </a:t>
-              </a:r>
-              <a:r>
-                <a:rPr lang="es-ES" sz="1400" dirty="0" err="1">
-                  <a:solidFill>
-                    <a:schemeClr val="tx1"/>
-                  </a:solidFill>
-                </a:rPr>
-                <a:t>Interconnect</a:t>
-              </a:r>
-              <a:endParaRPr lang="es-ES" sz="1400" dirty="0">
-                <a:solidFill>
-                  <a:schemeClr val="tx1"/>
-                </a:solidFill>
-              </a:endParaRPr>
-            </a:p>
-          </p:txBody>
-        </p:sp>
-        <p:sp>
-          <p:nvSpPr>
-            <p:cNvPr id="10" name="Flecha arriba y abajo 9"/>
-            <p:cNvSpPr/>
-            <p:nvPr/>
-          </p:nvSpPr>
-          <p:spPr>
-            <a:xfrm>
-              <a:off x="4043307" y="4193257"/>
-              <a:ext cx="160555" cy="293188"/>
-            </a:xfrm>
-            <a:prstGeom prst="upDownArrow">
-              <a:avLst/>
-            </a:prstGeom>
-            <a:solidFill>
-              <a:schemeClr val="accent4">
-                <a:lumMod val="60000"/>
-                <a:lumOff val="40000"/>
-              </a:schemeClr>
-            </a:solidFill>
-          </p:spPr>
-          <p:style>
-            <a:lnRef idx="2">
-              <a:schemeClr val="accent1">
-                <a:shade val="50000"/>
-              </a:schemeClr>
-            </a:lnRef>
-            <a:fillRef idx="1">
-              <a:schemeClr val="accent1"/>
-            </a:fillRef>
-            <a:effectRef idx="0">
-              <a:schemeClr val="accent1"/>
-            </a:effectRef>
-            <a:fontRef idx="minor">
-              <a:schemeClr val="lt1"/>
-            </a:fontRef>
-          </p:style>
-          <p:txBody>
-            <a:bodyPr rtlCol="0" anchor="ctr"/>
-            <a:lstStyle/>
-            <a:p>
-              <a:pPr algn="ctr"/>
-              <a:endParaRPr lang="es-ES"/>
-            </a:p>
-          </p:txBody>
-        </p:sp>
-        <p:sp>
-          <p:nvSpPr>
-            <p:cNvPr id="11" name="Rectángulo 10"/>
-            <p:cNvSpPr>
-              <a:spLocks noChangeAspect="1"/>
-            </p:cNvSpPr>
-            <p:nvPr/>
-          </p:nvSpPr>
-          <p:spPr>
-            <a:xfrm>
-              <a:off x="1339092" y="5070971"/>
-              <a:ext cx="1055343" cy="245731"/>
-            </a:xfrm>
-            <a:prstGeom prst="rect">
-              <a:avLst/>
-            </a:prstGeom>
-            <a:noFill/>
-            <a:ln w="25400">
-              <a:solidFill>
-                <a:schemeClr val="tx1"/>
-              </a:solidFill>
-            </a:ln>
-          </p:spPr>
-          <p:style>
-            <a:lnRef idx="2">
-              <a:schemeClr val="accent1">
-                <a:shade val="50000"/>
-              </a:schemeClr>
-            </a:lnRef>
-            <a:fillRef idx="1">
-              <a:schemeClr val="accent1"/>
-            </a:fillRef>
-            <a:effectRef idx="0">
-              <a:schemeClr val="accent1"/>
-            </a:effectRef>
-            <a:fontRef idx="minor">
-              <a:schemeClr val="lt1"/>
-            </a:fontRef>
-          </p:style>
-          <p:txBody>
-            <a:bodyPr rtlCol="0" anchor="ctr"/>
-            <a:lstStyle/>
-            <a:p>
-              <a:pPr algn="ctr"/>
-              <a:r>
-                <a:rPr lang="es-ES" sz="1400" dirty="0" err="1">
-                  <a:solidFill>
-                    <a:schemeClr val="tx1"/>
-                  </a:solidFill>
-                </a:rPr>
-                <a:t>Boot</a:t>
-              </a:r>
-              <a:r>
-                <a:rPr lang="es-ES" sz="1400" dirty="0">
-                  <a:solidFill>
-                    <a:schemeClr val="tx1"/>
-                  </a:solidFill>
-                </a:rPr>
-                <a:t>-ROM</a:t>
-              </a:r>
-              <a:endParaRPr lang="es-ES" sz="1000" dirty="0">
-                <a:solidFill>
-                  <a:schemeClr val="tx1"/>
-                </a:solidFill>
-              </a:endParaRPr>
-            </a:p>
-          </p:txBody>
-        </p:sp>
-        <p:sp>
-          <p:nvSpPr>
-            <p:cNvPr id="12" name="Rectángulo 11"/>
-            <p:cNvSpPr>
-              <a:spLocks noChangeAspect="1"/>
-            </p:cNvSpPr>
-            <p:nvPr/>
-          </p:nvSpPr>
-          <p:spPr>
-            <a:xfrm>
-              <a:off x="2490900" y="5078475"/>
-              <a:ext cx="1055343" cy="245731"/>
-            </a:xfrm>
-            <a:prstGeom prst="rect">
-              <a:avLst/>
-            </a:prstGeom>
-            <a:noFill/>
-            <a:ln w="25400">
-              <a:solidFill>
-                <a:schemeClr val="tx1"/>
-              </a:solidFill>
-            </a:ln>
-          </p:spPr>
-          <p:style>
-            <a:lnRef idx="2">
-              <a:schemeClr val="accent1">
-                <a:shade val="50000"/>
-              </a:schemeClr>
-            </a:lnRef>
-            <a:fillRef idx="1">
-              <a:schemeClr val="accent1"/>
-            </a:fillRef>
-            <a:effectRef idx="0">
-              <a:schemeClr val="accent1"/>
-            </a:effectRef>
-            <a:fontRef idx="minor">
-              <a:schemeClr val="lt1"/>
-            </a:fontRef>
-          </p:style>
-          <p:txBody>
-            <a:bodyPr rtlCol="0" anchor="ctr"/>
-            <a:lstStyle/>
-            <a:p>
-              <a:pPr algn="ctr"/>
-              <a:r>
-                <a:rPr lang="es-ES" sz="1400" dirty="0" err="1">
-                  <a:solidFill>
-                    <a:schemeClr val="tx1"/>
-                  </a:solidFill>
-                </a:rPr>
-                <a:t>System-Ctrl</a:t>
-              </a:r>
-              <a:endParaRPr lang="es-ES" sz="1000" dirty="0">
-                <a:solidFill>
-                  <a:schemeClr val="tx1"/>
-                </a:solidFill>
-              </a:endParaRPr>
-            </a:p>
-          </p:txBody>
-        </p:sp>
-        <p:sp>
-          <p:nvSpPr>
-            <p:cNvPr id="13" name="Rectángulo 12"/>
-            <p:cNvSpPr>
-              <a:spLocks/>
-            </p:cNvSpPr>
-            <p:nvPr/>
-          </p:nvSpPr>
-          <p:spPr>
-            <a:xfrm>
-              <a:off x="3642707" y="5078475"/>
-              <a:ext cx="554055" cy="245731"/>
-            </a:xfrm>
-            <a:prstGeom prst="rect">
-              <a:avLst/>
-            </a:prstGeom>
-            <a:noFill/>
-            <a:ln w="25400">
-              <a:solidFill>
-                <a:schemeClr val="tx1"/>
-              </a:solidFill>
-            </a:ln>
-          </p:spPr>
-          <p:style>
-            <a:lnRef idx="2">
-              <a:schemeClr val="accent1">
-                <a:shade val="50000"/>
-              </a:schemeClr>
-            </a:lnRef>
-            <a:fillRef idx="1">
-              <a:schemeClr val="accent1"/>
-            </a:fillRef>
-            <a:effectRef idx="0">
-              <a:schemeClr val="accent1"/>
-            </a:effectRef>
-            <a:fontRef idx="minor">
-              <a:schemeClr val="lt1"/>
-            </a:fontRef>
-          </p:style>
-          <p:txBody>
-            <a:bodyPr rtlCol="0" anchor="ctr"/>
-            <a:lstStyle/>
-            <a:p>
-              <a:pPr algn="ctr"/>
-              <a:r>
-                <a:rPr lang="es-ES" sz="1400" dirty="0">
-                  <a:solidFill>
-                    <a:schemeClr val="tx1"/>
-                  </a:solidFill>
-                </a:rPr>
-                <a:t>SPI1</a:t>
-              </a:r>
-              <a:endParaRPr lang="es-ES" sz="1000" dirty="0">
-                <a:solidFill>
-                  <a:schemeClr val="tx1"/>
-                </a:solidFill>
-              </a:endParaRPr>
-            </a:p>
-          </p:txBody>
-        </p:sp>
-        <p:sp>
-          <p:nvSpPr>
-            <p:cNvPr id="14" name="Rectángulo 13"/>
-            <p:cNvSpPr>
-              <a:spLocks/>
-            </p:cNvSpPr>
-            <p:nvPr/>
-          </p:nvSpPr>
-          <p:spPr>
-            <a:xfrm>
-              <a:off x="4293227" y="5078475"/>
-              <a:ext cx="554055" cy="245731"/>
-            </a:xfrm>
-            <a:prstGeom prst="rect">
-              <a:avLst/>
-            </a:prstGeom>
-            <a:solidFill>
-              <a:schemeClr val="bg1">
-                <a:alpha val="46000"/>
-              </a:schemeClr>
-            </a:solidFill>
-            <a:ln w="25400">
-              <a:solidFill>
-                <a:schemeClr val="tx1"/>
-              </a:solidFill>
-            </a:ln>
-          </p:spPr>
-          <p:style>
-            <a:lnRef idx="2">
-              <a:schemeClr val="accent1">
-                <a:shade val="50000"/>
-              </a:schemeClr>
-            </a:lnRef>
-            <a:fillRef idx="1">
-              <a:schemeClr val="accent1"/>
-            </a:fillRef>
-            <a:effectRef idx="0">
-              <a:schemeClr val="accent1"/>
-            </a:effectRef>
-            <a:fontRef idx="minor">
-              <a:schemeClr val="lt1"/>
-            </a:fontRef>
-          </p:style>
-          <p:txBody>
-            <a:bodyPr rtlCol="0" anchor="ctr"/>
-            <a:lstStyle/>
-            <a:p>
-              <a:pPr algn="ctr"/>
-              <a:r>
-                <a:rPr lang="es-ES" sz="1400" dirty="0">
-                  <a:solidFill>
-                    <a:schemeClr val="tx1"/>
-                  </a:solidFill>
-                </a:rPr>
-                <a:t>SPI2</a:t>
-              </a:r>
-              <a:endParaRPr lang="es-ES" sz="1000" dirty="0">
-                <a:solidFill>
-                  <a:schemeClr val="tx1"/>
-                </a:solidFill>
-              </a:endParaRPr>
-            </a:p>
-          </p:txBody>
-        </p:sp>
-        <p:sp>
-          <p:nvSpPr>
-            <p:cNvPr id="15" name="Rectángulo 14"/>
-            <p:cNvSpPr>
-              <a:spLocks/>
-            </p:cNvSpPr>
-            <p:nvPr/>
-          </p:nvSpPr>
-          <p:spPr>
-            <a:xfrm>
-              <a:off x="4943747" y="5078475"/>
-              <a:ext cx="659589" cy="245731"/>
-            </a:xfrm>
-            <a:prstGeom prst="rect">
-              <a:avLst/>
-            </a:prstGeom>
-            <a:solidFill>
-              <a:schemeClr val="bg1">
-                <a:alpha val="46000"/>
-              </a:schemeClr>
-            </a:solidFill>
-            <a:ln w="25400">
-              <a:solidFill>
-                <a:schemeClr val="tx1"/>
-              </a:solidFill>
-            </a:ln>
-          </p:spPr>
-          <p:style>
-            <a:lnRef idx="2">
-              <a:schemeClr val="accent1">
-                <a:shade val="50000"/>
-              </a:schemeClr>
-            </a:lnRef>
-            <a:fillRef idx="1">
-              <a:schemeClr val="accent1"/>
-            </a:fillRef>
-            <a:effectRef idx="0">
-              <a:schemeClr val="accent1"/>
-            </a:effectRef>
-            <a:fontRef idx="minor">
-              <a:schemeClr val="lt1"/>
-            </a:fontRef>
-          </p:style>
-          <p:txBody>
-            <a:bodyPr rtlCol="0" anchor="ctr"/>
-            <a:lstStyle/>
-            <a:p>
-              <a:pPr algn="ctr"/>
-              <a:r>
-                <a:rPr lang="es-ES" sz="1400" dirty="0" err="1">
-                  <a:solidFill>
-                    <a:schemeClr val="tx1"/>
-                  </a:solidFill>
-                </a:rPr>
-                <a:t>Timer</a:t>
-              </a:r>
-              <a:endParaRPr lang="es-ES" sz="1000" dirty="0">
-                <a:solidFill>
-                  <a:schemeClr val="tx1"/>
-                </a:solidFill>
-              </a:endParaRPr>
-            </a:p>
-          </p:txBody>
-        </p:sp>
-        <p:sp>
-          <p:nvSpPr>
-            <p:cNvPr id="16" name="Rectángulo 15"/>
-            <p:cNvSpPr>
-              <a:spLocks/>
-            </p:cNvSpPr>
-            <p:nvPr/>
-          </p:nvSpPr>
-          <p:spPr>
-            <a:xfrm>
-              <a:off x="5699801" y="5078475"/>
-              <a:ext cx="606822" cy="245731"/>
-            </a:xfrm>
-            <a:prstGeom prst="rect">
-              <a:avLst/>
-            </a:prstGeom>
-            <a:solidFill>
-              <a:schemeClr val="bg1">
-                <a:alpha val="46000"/>
-              </a:schemeClr>
-            </a:solidFill>
-            <a:ln w="25400">
-              <a:solidFill>
-                <a:schemeClr val="tx1"/>
-              </a:solidFill>
-            </a:ln>
-          </p:spPr>
-          <p:style>
-            <a:lnRef idx="2">
-              <a:schemeClr val="accent1">
-                <a:shade val="50000"/>
-              </a:schemeClr>
-            </a:lnRef>
-            <a:fillRef idx="1">
-              <a:schemeClr val="accent1"/>
-            </a:fillRef>
-            <a:effectRef idx="0">
-              <a:schemeClr val="accent1"/>
-            </a:effectRef>
-            <a:fontRef idx="minor">
-              <a:schemeClr val="lt1"/>
-            </a:fontRef>
-          </p:style>
-          <p:txBody>
-            <a:bodyPr rtlCol="0" anchor="ctr"/>
-            <a:lstStyle/>
-            <a:p>
-              <a:pPr algn="ctr"/>
-              <a:r>
-                <a:rPr lang="es-ES" sz="1400" dirty="0">
-                  <a:solidFill>
-                    <a:schemeClr val="tx1"/>
-                  </a:solidFill>
-                </a:rPr>
-                <a:t>GPIO</a:t>
-              </a:r>
-              <a:endParaRPr lang="es-ES" sz="1000" dirty="0">
-                <a:solidFill>
-                  <a:schemeClr val="tx1"/>
-                </a:solidFill>
-              </a:endParaRPr>
-            </a:p>
-          </p:txBody>
-        </p:sp>
-        <p:sp>
-          <p:nvSpPr>
-            <p:cNvPr id="17" name="Rectángulo 16"/>
-            <p:cNvSpPr>
-              <a:spLocks/>
-            </p:cNvSpPr>
-            <p:nvPr/>
-          </p:nvSpPr>
-          <p:spPr>
-            <a:xfrm>
-              <a:off x="6403088" y="5078475"/>
-              <a:ext cx="606822" cy="245731"/>
-            </a:xfrm>
-            <a:prstGeom prst="rect">
-              <a:avLst/>
-            </a:prstGeom>
-            <a:noFill/>
-            <a:ln w="25400">
-              <a:solidFill>
-                <a:schemeClr val="tx1"/>
-              </a:solidFill>
-            </a:ln>
-          </p:spPr>
-          <p:style>
-            <a:lnRef idx="2">
-              <a:schemeClr val="accent1">
-                <a:shade val="50000"/>
-              </a:schemeClr>
-            </a:lnRef>
-            <a:fillRef idx="1">
-              <a:schemeClr val="accent1"/>
-            </a:fillRef>
-            <a:effectRef idx="0">
-              <a:schemeClr val="accent1"/>
-            </a:effectRef>
-            <a:fontRef idx="minor">
-              <a:schemeClr val="lt1"/>
-            </a:fontRef>
-          </p:style>
-          <p:txBody>
-            <a:bodyPr rtlCol="0" anchor="ctr"/>
-            <a:lstStyle/>
-            <a:p>
-              <a:pPr algn="ctr"/>
-              <a:r>
-                <a:rPr lang="es-ES" sz="1400" dirty="0">
-                  <a:solidFill>
-                    <a:schemeClr val="tx1"/>
-                  </a:solidFill>
-                </a:rPr>
-                <a:t>UART</a:t>
-              </a:r>
-              <a:endParaRPr lang="es-ES" sz="1000" dirty="0">
-                <a:solidFill>
-                  <a:schemeClr val="tx1"/>
-                </a:solidFill>
-              </a:endParaRPr>
-            </a:p>
-          </p:txBody>
-        </p:sp>
-        <p:sp>
-          <p:nvSpPr>
-            <p:cNvPr id="18" name="Flecha arriba y abajo 17"/>
-            <p:cNvSpPr/>
-            <p:nvPr/>
-          </p:nvSpPr>
-          <p:spPr>
-            <a:xfrm>
-              <a:off x="4043307" y="4736904"/>
-              <a:ext cx="160555" cy="293188"/>
-            </a:xfrm>
-            <a:prstGeom prst="upDownArrow">
-              <a:avLst/>
-            </a:prstGeom>
-            <a:solidFill>
-              <a:schemeClr val="accent4">
-                <a:lumMod val="60000"/>
-                <a:lumOff val="40000"/>
-              </a:schemeClr>
-            </a:solidFill>
-          </p:spPr>
-          <p:style>
-            <a:lnRef idx="2">
-              <a:schemeClr val="accent1">
-                <a:shade val="50000"/>
-              </a:schemeClr>
-            </a:lnRef>
-            <a:fillRef idx="1">
-              <a:schemeClr val="accent1"/>
-            </a:fillRef>
-            <a:effectRef idx="0">
-              <a:schemeClr val="accent1"/>
-            </a:effectRef>
-            <a:fontRef idx="minor">
-              <a:schemeClr val="lt1"/>
-            </a:fontRef>
-          </p:style>
-          <p:txBody>
-            <a:bodyPr rtlCol="0" anchor="ctr"/>
-            <a:lstStyle/>
-            <a:p>
-              <a:pPr algn="ctr"/>
-              <a:endParaRPr lang="es-ES"/>
-            </a:p>
-          </p:txBody>
-        </p:sp>
-        <p:sp>
-          <p:nvSpPr>
-            <p:cNvPr id="19" name="Flecha doblada 18"/>
-            <p:cNvSpPr/>
-            <p:nvPr/>
-          </p:nvSpPr>
-          <p:spPr>
-            <a:xfrm rot="10800000" flipH="1">
-              <a:off x="5001259" y="3661719"/>
-              <a:ext cx="2333812" cy="264909"/>
-            </a:xfrm>
-            <a:prstGeom prst="bentArrow">
-              <a:avLst>
-                <a:gd name="adj1" fmla="val 20399"/>
-                <a:gd name="adj2" fmla="val 25332"/>
-                <a:gd name="adj3" fmla="val 34706"/>
-                <a:gd name="adj4" fmla="val 43750"/>
-              </a:avLst>
-            </a:prstGeom>
-            <a:solidFill>
-              <a:schemeClr val="accent4">
-                <a:lumMod val="60000"/>
-                <a:lumOff val="40000"/>
-              </a:schemeClr>
-            </a:solidFill>
-          </p:spPr>
-          <p:style>
-            <a:lnRef idx="2">
-              <a:schemeClr val="accent1">
-                <a:shade val="50000"/>
-              </a:schemeClr>
-            </a:lnRef>
-            <a:fillRef idx="1">
-              <a:schemeClr val="accent1"/>
-            </a:fillRef>
-            <a:effectRef idx="0">
-              <a:schemeClr val="accent1"/>
-            </a:effectRef>
-            <a:fontRef idx="minor">
-              <a:schemeClr val="lt1"/>
-            </a:fontRef>
-          </p:style>
-          <p:txBody>
-            <a:bodyPr rtlCol="0" anchor="ctr"/>
-            <a:lstStyle/>
-            <a:p>
-              <a:pPr algn="ctr"/>
-              <a:endParaRPr lang="es-ES">
-                <a:solidFill>
-                  <a:schemeClr val="tx1"/>
-                </a:solidFill>
-              </a:endParaRPr>
-            </a:p>
-          </p:txBody>
-        </p:sp>
-        <p:sp>
-          <p:nvSpPr>
-            <p:cNvPr id="20" name="Rectángulo 19"/>
-            <p:cNvSpPr/>
-            <p:nvPr/>
-          </p:nvSpPr>
-          <p:spPr>
-            <a:xfrm>
-              <a:off x="5728411" y="3561130"/>
-              <a:ext cx="1206677" cy="307777"/>
-            </a:xfrm>
-            <a:prstGeom prst="rect">
-              <a:avLst/>
-            </a:prstGeom>
-          </p:spPr>
-          <p:txBody>
-            <a:bodyPr wrap="none">
-              <a:spAutoFit/>
-            </a:bodyPr>
-            <a:lstStyle/>
-            <a:p>
-              <a:pPr algn="ctr"/>
-              <a:r>
-                <a:rPr lang="es-ES" sz="1400" dirty="0">
-                  <a:solidFill>
-                    <a:schemeClr val="tx1"/>
-                  </a:solidFill>
-                </a:rPr>
-                <a:t>RAM </a:t>
-              </a:r>
-              <a:r>
-                <a:rPr lang="es-ES" sz="1400" dirty="0" err="1">
-                  <a:solidFill>
-                    <a:schemeClr val="tx1"/>
-                  </a:solidFill>
-                </a:rPr>
-                <a:t>Memory</a:t>
-              </a:r>
-              <a:endParaRPr lang="es-ES" sz="1400" dirty="0">
-                <a:solidFill>
-                  <a:schemeClr val="tx1"/>
-                </a:solidFill>
-              </a:endParaRPr>
-            </a:p>
-          </p:txBody>
-        </p:sp>
-        <p:sp>
-          <p:nvSpPr>
-            <p:cNvPr id="3" name="Rectángulo 2"/>
-            <p:cNvSpPr/>
-            <p:nvPr/>
-          </p:nvSpPr>
-          <p:spPr>
-            <a:xfrm>
-              <a:off x="1237760" y="1850901"/>
-              <a:ext cx="5876925" cy="3607226"/>
-            </a:xfrm>
-            <a:prstGeom prst="rect">
-              <a:avLst/>
-            </a:prstGeom>
-            <a:noFill/>
-            <a:ln w="19050">
-              <a:solidFill>
-                <a:schemeClr val="tx1"/>
-              </a:solidFill>
-            </a:ln>
-          </p:spPr>
-          <p:style>
-            <a:lnRef idx="2">
-              <a:schemeClr val="accent1">
-                <a:shade val="50000"/>
-              </a:schemeClr>
-            </a:lnRef>
-            <a:fillRef idx="1">
-              <a:schemeClr val="accent1"/>
-            </a:fillRef>
-            <a:effectRef idx="0">
-              <a:schemeClr val="accent1"/>
-            </a:effectRef>
-            <a:fontRef idx="minor">
-              <a:schemeClr val="lt1"/>
-            </a:fontRef>
-          </p:style>
-          <p:txBody>
-            <a:bodyPr rtlCol="0" anchor="ctr"/>
-            <a:lstStyle/>
-            <a:p>
-              <a:pPr algn="ctr"/>
-              <a:endParaRPr lang="es-ES"/>
-            </a:p>
-          </p:txBody>
-        </p:sp>
-        <p:sp>
-          <p:nvSpPr>
-            <p:cNvPr id="21" name="CuadroTexto 20"/>
-            <p:cNvSpPr txBox="1"/>
-            <p:nvPr/>
-          </p:nvSpPr>
-          <p:spPr>
-            <a:xfrm>
-              <a:off x="1262892" y="1875105"/>
-              <a:ext cx="1831299" cy="400110"/>
-            </a:xfrm>
-            <a:prstGeom prst="rect">
-              <a:avLst/>
-            </a:prstGeom>
-            <a:noFill/>
-          </p:spPr>
-          <p:txBody>
-            <a:bodyPr wrap="square" rtlCol="0">
-              <a:spAutoFit/>
-            </a:bodyPr>
-            <a:lstStyle/>
-            <a:p>
-              <a:r>
-                <a:rPr lang="es-ES" sz="2000" b="1" dirty="0" err="1"/>
-                <a:t>VeeRwolfX</a:t>
-              </a:r>
-              <a:r>
-                <a:rPr lang="es-ES" sz="2000" b="1" dirty="0"/>
-                <a:t> </a:t>
-              </a:r>
-              <a:r>
-                <a:rPr lang="es-ES" sz="2000" b="1" dirty="0" err="1"/>
-                <a:t>SoC</a:t>
-              </a:r>
-              <a:endParaRPr lang="es-ES" sz="2000" b="1" dirty="0"/>
-            </a:p>
-          </p:txBody>
-        </p:sp>
-        <p:cxnSp>
-          <p:nvCxnSpPr>
-            <p:cNvPr id="22" name="Conector recto de flecha 21"/>
-            <p:cNvCxnSpPr/>
-            <p:nvPr/>
-          </p:nvCxnSpPr>
-          <p:spPr>
-            <a:xfrm flipV="1">
-              <a:off x="2913796" y="5324207"/>
-              <a:ext cx="0" cy="864000"/>
-            </a:xfrm>
-            <a:prstGeom prst="straightConnector1">
-              <a:avLst/>
-            </a:prstGeom>
-            <a:ln w="25400">
-              <a:solidFill>
-                <a:schemeClr val="tx1"/>
-              </a:solidFill>
-              <a:headEnd type="triangle" w="lg" len="med"/>
-              <a:tailEnd type="none" w="lg" len="med"/>
-            </a:ln>
-          </p:spPr>
-          <p:style>
-            <a:lnRef idx="1">
-              <a:schemeClr val="accent1"/>
-            </a:lnRef>
-            <a:fillRef idx="0">
-              <a:schemeClr val="accent1"/>
-            </a:fillRef>
-            <a:effectRef idx="0">
-              <a:schemeClr val="accent1"/>
-            </a:effectRef>
-            <a:fontRef idx="minor">
-              <a:schemeClr val="tx1"/>
-            </a:fontRef>
-          </p:style>
-        </p:cxnSp>
-        <p:pic>
-          <p:nvPicPr>
-            <p:cNvPr id="26" name="Imagen 25"/>
-            <p:cNvPicPr>
-              <a:picLocks noChangeAspect="1"/>
-            </p:cNvPicPr>
-            <p:nvPr/>
-          </p:nvPicPr>
-          <p:blipFill>
-            <a:blip r:embed="rId2"/>
-            <a:stretch>
-              <a:fillRect/>
-            </a:stretch>
-          </p:blipFill>
-          <p:spPr>
-            <a:xfrm>
-              <a:off x="1731165" y="6255374"/>
-              <a:ext cx="1605979" cy="264026"/>
-            </a:xfrm>
-            <a:prstGeom prst="rect">
-              <a:avLst/>
-            </a:prstGeom>
-          </p:spPr>
-        </p:pic>
-        <p:cxnSp>
-          <p:nvCxnSpPr>
-            <p:cNvPr id="31" name="Conector recto de flecha 30"/>
-            <p:cNvCxnSpPr/>
-            <p:nvPr/>
-          </p:nvCxnSpPr>
-          <p:spPr>
-            <a:xfrm flipV="1">
-              <a:off x="3919734" y="5316703"/>
-              <a:ext cx="0" cy="339386"/>
-            </a:xfrm>
-            <a:prstGeom prst="straightConnector1">
-              <a:avLst/>
-            </a:prstGeom>
-            <a:ln w="25400">
-              <a:solidFill>
-                <a:schemeClr val="tx1"/>
-              </a:solidFill>
-              <a:headEnd type="triangle" w="lg" len="med"/>
-              <a:tailEnd type="triangle" w="lg" len="med"/>
-            </a:ln>
-          </p:spPr>
-          <p:style>
-            <a:lnRef idx="1">
-              <a:schemeClr val="accent1"/>
-            </a:lnRef>
-            <a:fillRef idx="0">
-              <a:schemeClr val="accent1"/>
-            </a:fillRef>
-            <a:effectRef idx="0">
-              <a:schemeClr val="accent1"/>
-            </a:effectRef>
-            <a:fontRef idx="minor">
-              <a:schemeClr val="tx1"/>
-            </a:fontRef>
-          </p:style>
-        </p:cxnSp>
-        <p:pic>
-          <p:nvPicPr>
-            <p:cNvPr id="34" name="Imagen 33"/>
-            <p:cNvPicPr>
-              <a:picLocks noChangeAspect="1"/>
-            </p:cNvPicPr>
-            <p:nvPr/>
-          </p:nvPicPr>
-          <p:blipFill>
-            <a:blip r:embed="rId3"/>
-            <a:stretch>
-              <a:fillRect/>
-            </a:stretch>
-          </p:blipFill>
-          <p:spPr>
-            <a:xfrm>
-              <a:off x="4353433" y="5954542"/>
-              <a:ext cx="777605" cy="777605"/>
-            </a:xfrm>
-            <a:prstGeom prst="rect">
-              <a:avLst/>
-            </a:prstGeom>
-          </p:spPr>
-        </p:pic>
-        <p:cxnSp>
-          <p:nvCxnSpPr>
-            <p:cNvPr id="35" name="Conector recto de flecha 34"/>
-            <p:cNvCxnSpPr/>
-            <p:nvPr/>
-          </p:nvCxnSpPr>
-          <p:spPr>
-            <a:xfrm flipV="1">
-              <a:off x="4570254" y="5324207"/>
-              <a:ext cx="0" cy="737235"/>
-            </a:xfrm>
-            <a:prstGeom prst="straightConnector1">
-              <a:avLst/>
-            </a:prstGeom>
-            <a:ln w="25400">
-              <a:solidFill>
-                <a:schemeClr val="tx1"/>
-              </a:solidFill>
-              <a:headEnd type="triangle" w="lg" len="med"/>
-              <a:tailEnd type="triangle" w="lg" len="med"/>
-            </a:ln>
-          </p:spPr>
-          <p:style>
-            <a:lnRef idx="1">
-              <a:schemeClr val="accent1"/>
-            </a:lnRef>
-            <a:fillRef idx="0">
-              <a:schemeClr val="accent1"/>
-            </a:fillRef>
-            <a:effectRef idx="0">
-              <a:schemeClr val="accent1"/>
-            </a:effectRef>
-            <a:fontRef idx="minor">
-              <a:schemeClr val="tx1"/>
-            </a:fontRef>
-          </p:style>
-        </p:cxnSp>
         <p:grpSp>
           <p:nvGrpSpPr>
-            <p:cNvPr id="43" name="Grupo 42"/>
+            <p:cNvPr id="24" name="Group 23">
+              <a:extLst>
+                <a:ext uri="{FF2B5EF4-FFF2-40B4-BE49-F238E27FC236}">
+                  <a16:creationId xmlns:a16="http://schemas.microsoft.com/office/drawing/2014/main" id="{1BAD1284-26ED-E070-A457-E26860567491}"/>
+                </a:ext>
+              </a:extLst>
+            </p:cNvPr>
             <p:cNvGrpSpPr/>
             <p:nvPr/>
           </p:nvGrpSpPr>
           <p:grpSpPr>
             <a:xfrm>
-              <a:off x="5491415" y="6088617"/>
-              <a:ext cx="1045773" cy="647439"/>
-              <a:chOff x="7311402" y="5697451"/>
-              <a:chExt cx="1045773" cy="647439"/>
+              <a:off x="1237760" y="351472"/>
+              <a:ext cx="8936227" cy="6384584"/>
+              <a:chOff x="1237760" y="351472"/>
+              <a:chExt cx="8936227" cy="6384584"/>
             </a:xfrm>
           </p:grpSpPr>
+          <p:sp>
+            <p:nvSpPr>
+              <p:cNvPr id="5" name="Rectángulo redondeado 4"/>
+              <p:cNvSpPr/>
+              <p:nvPr/>
+            </p:nvSpPr>
+            <p:spPr>
+              <a:xfrm>
+                <a:off x="3094191" y="3424381"/>
+                <a:ext cx="2058789" cy="238347"/>
+              </a:xfrm>
+              <a:prstGeom prst="roundRect">
+                <a:avLst/>
+              </a:prstGeom>
+              <a:solidFill>
+                <a:srgbClr val="FFFF99"/>
+              </a:solidFill>
+            </p:spPr>
+            <p:style>
+              <a:lnRef idx="2">
+                <a:schemeClr val="accent1">
+                  <a:shade val="50000"/>
+                </a:schemeClr>
+              </a:lnRef>
+              <a:fillRef idx="1">
+                <a:schemeClr val="accent1"/>
+              </a:fillRef>
+              <a:effectRef idx="0">
+                <a:schemeClr val="accent1"/>
+              </a:effectRef>
+              <a:fontRef idx="minor">
+                <a:schemeClr val="lt1"/>
+              </a:fontRef>
+            </p:style>
+            <p:txBody>
+              <a:bodyPr rtlCol="0" anchor="ctr"/>
+              <a:lstStyle/>
+              <a:p>
+                <a:pPr algn="ctr"/>
+                <a:r>
+                  <a:rPr lang="es-ES" sz="1400" dirty="0">
+                    <a:solidFill>
+                      <a:schemeClr val="tx1"/>
+                    </a:solidFill>
+                  </a:rPr>
+                  <a:t>AXI </a:t>
+                </a:r>
+                <a:r>
+                  <a:rPr lang="es-ES" sz="1400" dirty="0" err="1">
+                    <a:solidFill>
+                      <a:schemeClr val="tx1"/>
+                    </a:solidFill>
+                  </a:rPr>
+                  <a:t>Interconnect</a:t>
+                </a:r>
+                <a:endParaRPr lang="es-ES" sz="1400" dirty="0">
+                  <a:solidFill>
+                    <a:schemeClr val="tx1"/>
+                  </a:solidFill>
+                </a:endParaRPr>
+              </a:p>
+            </p:txBody>
+          </p:sp>
+          <p:sp>
+            <p:nvSpPr>
+              <p:cNvPr id="6" name="Rectángulo redondeado 5"/>
+              <p:cNvSpPr/>
+              <p:nvPr/>
+            </p:nvSpPr>
+            <p:spPr>
+              <a:xfrm>
+                <a:off x="3094191" y="3954910"/>
+                <a:ext cx="2058789" cy="238347"/>
+              </a:xfrm>
+              <a:prstGeom prst="roundRect">
+                <a:avLst/>
+              </a:prstGeom>
+              <a:solidFill>
+                <a:srgbClr val="FFFF99"/>
+              </a:solidFill>
+            </p:spPr>
+            <p:style>
+              <a:lnRef idx="2">
+                <a:schemeClr val="accent1">
+                  <a:shade val="50000"/>
+                </a:schemeClr>
+              </a:lnRef>
+              <a:fillRef idx="1">
+                <a:schemeClr val="accent1"/>
+              </a:fillRef>
+              <a:effectRef idx="0">
+                <a:schemeClr val="accent1"/>
+              </a:effectRef>
+              <a:fontRef idx="minor">
+                <a:schemeClr val="lt1"/>
+              </a:fontRef>
+            </p:style>
+            <p:txBody>
+              <a:bodyPr rtlCol="0" anchor="ctr"/>
+              <a:lstStyle/>
+              <a:p>
+                <a:pPr algn="ctr"/>
+                <a:r>
+                  <a:rPr lang="es-ES" sz="1400" dirty="0">
+                    <a:solidFill>
+                      <a:schemeClr val="tx1"/>
+                    </a:solidFill>
+                  </a:rPr>
+                  <a:t>AXI-</a:t>
+                </a:r>
+                <a:r>
+                  <a:rPr lang="es-ES" sz="1400" dirty="0" err="1">
+                    <a:solidFill>
+                      <a:schemeClr val="tx1"/>
+                    </a:solidFill>
+                  </a:rPr>
+                  <a:t>Wishbone</a:t>
+                </a:r>
+                <a:r>
+                  <a:rPr lang="es-ES" sz="1400" dirty="0">
+                    <a:solidFill>
+                      <a:schemeClr val="tx1"/>
+                    </a:solidFill>
+                  </a:rPr>
+                  <a:t> Bridge</a:t>
+                </a:r>
+              </a:p>
+            </p:txBody>
+          </p:sp>
+          <p:sp>
+            <p:nvSpPr>
+              <p:cNvPr id="8" name="Flecha arriba y abajo 7"/>
+              <p:cNvSpPr/>
+              <p:nvPr/>
+            </p:nvSpPr>
+            <p:spPr>
+              <a:xfrm>
+                <a:off x="4043307" y="3662225"/>
+                <a:ext cx="160555" cy="293188"/>
+              </a:xfrm>
+              <a:prstGeom prst="upDownArrow">
+                <a:avLst/>
+              </a:prstGeom>
+              <a:solidFill>
+                <a:schemeClr val="accent4">
+                  <a:lumMod val="60000"/>
+                  <a:lumOff val="40000"/>
+                </a:schemeClr>
+              </a:solidFill>
+            </p:spPr>
+            <p:style>
+              <a:lnRef idx="2">
+                <a:schemeClr val="accent1">
+                  <a:shade val="50000"/>
+                </a:schemeClr>
+              </a:lnRef>
+              <a:fillRef idx="1">
+                <a:schemeClr val="accent1"/>
+              </a:fillRef>
+              <a:effectRef idx="0">
+                <a:schemeClr val="accent1"/>
+              </a:effectRef>
+              <a:fontRef idx="minor">
+                <a:schemeClr val="lt1"/>
+              </a:fontRef>
+            </p:style>
+            <p:txBody>
+              <a:bodyPr rtlCol="0" anchor="ctr"/>
+              <a:lstStyle/>
+              <a:p>
+                <a:pPr algn="ctr"/>
+                <a:endParaRPr lang="es-ES"/>
+              </a:p>
+            </p:txBody>
+          </p:sp>
+          <p:sp>
+            <p:nvSpPr>
+              <p:cNvPr id="9" name="Rectángulo redondeado 8"/>
+              <p:cNvSpPr/>
+              <p:nvPr/>
+            </p:nvSpPr>
+            <p:spPr>
+              <a:xfrm>
+                <a:off x="3094191" y="4485943"/>
+                <a:ext cx="2058789" cy="238347"/>
+              </a:xfrm>
+              <a:prstGeom prst="roundRect">
+                <a:avLst/>
+              </a:prstGeom>
+              <a:solidFill>
+                <a:srgbClr val="FFFF99"/>
+              </a:solidFill>
+            </p:spPr>
+            <p:style>
+              <a:lnRef idx="2">
+                <a:schemeClr val="accent1">
+                  <a:shade val="50000"/>
+                </a:schemeClr>
+              </a:lnRef>
+              <a:fillRef idx="1">
+                <a:schemeClr val="accent1"/>
+              </a:fillRef>
+              <a:effectRef idx="0">
+                <a:schemeClr val="accent1"/>
+              </a:effectRef>
+              <a:fontRef idx="minor">
+                <a:schemeClr val="lt1"/>
+              </a:fontRef>
+            </p:style>
+            <p:txBody>
+              <a:bodyPr rtlCol="0" anchor="ctr"/>
+              <a:lstStyle/>
+              <a:p>
+                <a:pPr algn="ctr"/>
+                <a:r>
+                  <a:rPr lang="es-ES" sz="1400" dirty="0" err="1">
+                    <a:solidFill>
+                      <a:schemeClr val="tx1"/>
+                    </a:solidFill>
+                  </a:rPr>
+                  <a:t>Wishbone</a:t>
+                </a:r>
+                <a:r>
+                  <a:rPr lang="es-ES" sz="1400" dirty="0">
+                    <a:solidFill>
+                      <a:schemeClr val="tx1"/>
+                    </a:solidFill>
+                  </a:rPr>
+                  <a:t> </a:t>
+                </a:r>
+                <a:r>
+                  <a:rPr lang="es-ES" sz="1400" dirty="0" err="1">
+                    <a:solidFill>
+                      <a:schemeClr val="tx1"/>
+                    </a:solidFill>
+                  </a:rPr>
+                  <a:t>Interconnect</a:t>
+                </a:r>
+                <a:endParaRPr lang="es-ES" sz="1400" dirty="0">
+                  <a:solidFill>
+                    <a:schemeClr val="tx1"/>
+                  </a:solidFill>
+                </a:endParaRPr>
+              </a:p>
+            </p:txBody>
+          </p:sp>
+          <p:sp>
+            <p:nvSpPr>
+              <p:cNvPr id="10" name="Flecha arriba y abajo 9"/>
+              <p:cNvSpPr/>
+              <p:nvPr/>
+            </p:nvSpPr>
+            <p:spPr>
+              <a:xfrm>
+                <a:off x="4043307" y="4193257"/>
+                <a:ext cx="160555" cy="293188"/>
+              </a:xfrm>
+              <a:prstGeom prst="upDownArrow">
+                <a:avLst/>
+              </a:prstGeom>
+              <a:solidFill>
+                <a:schemeClr val="accent4">
+                  <a:lumMod val="60000"/>
+                  <a:lumOff val="40000"/>
+                </a:schemeClr>
+              </a:solidFill>
+            </p:spPr>
+            <p:style>
+              <a:lnRef idx="2">
+                <a:schemeClr val="accent1">
+                  <a:shade val="50000"/>
+                </a:schemeClr>
+              </a:lnRef>
+              <a:fillRef idx="1">
+                <a:schemeClr val="accent1"/>
+              </a:fillRef>
+              <a:effectRef idx="0">
+                <a:schemeClr val="accent1"/>
+              </a:effectRef>
+              <a:fontRef idx="minor">
+                <a:schemeClr val="lt1"/>
+              </a:fontRef>
+            </p:style>
+            <p:txBody>
+              <a:bodyPr rtlCol="0" anchor="ctr"/>
+              <a:lstStyle/>
+              <a:p>
+                <a:pPr algn="ctr"/>
+                <a:endParaRPr lang="es-ES"/>
+              </a:p>
+            </p:txBody>
+          </p:sp>
+          <p:sp>
+            <p:nvSpPr>
+              <p:cNvPr id="11" name="Rectángulo 10"/>
+              <p:cNvSpPr>
+                <a:spLocks noChangeAspect="1"/>
+              </p:cNvSpPr>
+              <p:nvPr/>
+            </p:nvSpPr>
+            <p:spPr>
+              <a:xfrm>
+                <a:off x="1339092" y="5070971"/>
+                <a:ext cx="1055343" cy="245731"/>
+              </a:xfrm>
+              <a:prstGeom prst="rect">
+                <a:avLst/>
+              </a:prstGeom>
+              <a:noFill/>
+              <a:ln w="25400">
+                <a:solidFill>
+                  <a:schemeClr val="tx1"/>
+                </a:solidFill>
+              </a:ln>
+            </p:spPr>
+            <p:style>
+              <a:lnRef idx="2">
+                <a:schemeClr val="accent1">
+                  <a:shade val="50000"/>
+                </a:schemeClr>
+              </a:lnRef>
+              <a:fillRef idx="1">
+                <a:schemeClr val="accent1"/>
+              </a:fillRef>
+              <a:effectRef idx="0">
+                <a:schemeClr val="accent1"/>
+              </a:effectRef>
+              <a:fontRef idx="minor">
+                <a:schemeClr val="lt1"/>
+              </a:fontRef>
+            </p:style>
+            <p:txBody>
+              <a:bodyPr rtlCol="0" anchor="ctr"/>
+              <a:lstStyle/>
+              <a:p>
+                <a:pPr algn="ctr"/>
+                <a:r>
+                  <a:rPr lang="es-ES" sz="1400" dirty="0" err="1">
+                    <a:solidFill>
+                      <a:schemeClr val="tx1"/>
+                    </a:solidFill>
+                  </a:rPr>
+                  <a:t>Boot</a:t>
+                </a:r>
+                <a:r>
+                  <a:rPr lang="es-ES" sz="1400" dirty="0">
+                    <a:solidFill>
+                      <a:schemeClr val="tx1"/>
+                    </a:solidFill>
+                  </a:rPr>
+                  <a:t>-ROM</a:t>
+                </a:r>
+                <a:endParaRPr lang="es-ES" sz="1000" dirty="0">
+                  <a:solidFill>
+                    <a:schemeClr val="tx1"/>
+                  </a:solidFill>
+                </a:endParaRPr>
+              </a:p>
+            </p:txBody>
+          </p:sp>
+          <p:sp>
+            <p:nvSpPr>
+              <p:cNvPr id="12" name="Rectángulo 11"/>
+              <p:cNvSpPr>
+                <a:spLocks noChangeAspect="1"/>
+              </p:cNvSpPr>
+              <p:nvPr/>
+            </p:nvSpPr>
+            <p:spPr>
+              <a:xfrm>
+                <a:off x="2490900" y="5078475"/>
+                <a:ext cx="1055343" cy="245731"/>
+              </a:xfrm>
+              <a:prstGeom prst="rect">
+                <a:avLst/>
+              </a:prstGeom>
+              <a:noFill/>
+              <a:ln w="25400">
+                <a:solidFill>
+                  <a:schemeClr val="tx1"/>
+                </a:solidFill>
+              </a:ln>
+            </p:spPr>
+            <p:style>
+              <a:lnRef idx="2">
+                <a:schemeClr val="accent1">
+                  <a:shade val="50000"/>
+                </a:schemeClr>
+              </a:lnRef>
+              <a:fillRef idx="1">
+                <a:schemeClr val="accent1"/>
+              </a:fillRef>
+              <a:effectRef idx="0">
+                <a:schemeClr val="accent1"/>
+              </a:effectRef>
+              <a:fontRef idx="minor">
+                <a:schemeClr val="lt1"/>
+              </a:fontRef>
+            </p:style>
+            <p:txBody>
+              <a:bodyPr rtlCol="0" anchor="ctr"/>
+              <a:lstStyle/>
+              <a:p>
+                <a:pPr algn="ctr"/>
+                <a:r>
+                  <a:rPr lang="es-ES" sz="1400" dirty="0" err="1">
+                    <a:solidFill>
+                      <a:schemeClr val="tx1"/>
+                    </a:solidFill>
+                  </a:rPr>
+                  <a:t>System-Ctrl</a:t>
+                </a:r>
+                <a:endParaRPr lang="es-ES" sz="1000" dirty="0">
+                  <a:solidFill>
+                    <a:schemeClr val="tx1"/>
+                  </a:solidFill>
+                </a:endParaRPr>
+              </a:p>
+            </p:txBody>
+          </p:sp>
+          <p:sp>
+            <p:nvSpPr>
+              <p:cNvPr id="13" name="Rectángulo 12"/>
+              <p:cNvSpPr>
+                <a:spLocks/>
+              </p:cNvSpPr>
+              <p:nvPr/>
+            </p:nvSpPr>
+            <p:spPr>
+              <a:xfrm>
+                <a:off x="3642707" y="5078475"/>
+                <a:ext cx="554055" cy="245731"/>
+              </a:xfrm>
+              <a:prstGeom prst="rect">
+                <a:avLst/>
+              </a:prstGeom>
+              <a:noFill/>
+              <a:ln w="25400">
+                <a:solidFill>
+                  <a:schemeClr val="tx1"/>
+                </a:solidFill>
+              </a:ln>
+            </p:spPr>
+            <p:style>
+              <a:lnRef idx="2">
+                <a:schemeClr val="accent1">
+                  <a:shade val="50000"/>
+                </a:schemeClr>
+              </a:lnRef>
+              <a:fillRef idx="1">
+                <a:schemeClr val="accent1"/>
+              </a:fillRef>
+              <a:effectRef idx="0">
+                <a:schemeClr val="accent1"/>
+              </a:effectRef>
+              <a:fontRef idx="minor">
+                <a:schemeClr val="lt1"/>
+              </a:fontRef>
+            </p:style>
+            <p:txBody>
+              <a:bodyPr rtlCol="0" anchor="ctr"/>
+              <a:lstStyle/>
+              <a:p>
+                <a:pPr algn="ctr"/>
+                <a:r>
+                  <a:rPr lang="es-ES" sz="1400" dirty="0">
+                    <a:solidFill>
+                      <a:schemeClr val="tx1"/>
+                    </a:solidFill>
+                  </a:rPr>
+                  <a:t>SPI1</a:t>
+                </a:r>
+                <a:endParaRPr lang="es-ES" sz="1000" dirty="0">
+                  <a:solidFill>
+                    <a:schemeClr val="tx1"/>
+                  </a:solidFill>
+                </a:endParaRPr>
+              </a:p>
+            </p:txBody>
+          </p:sp>
+          <p:sp>
+            <p:nvSpPr>
+              <p:cNvPr id="14" name="Rectángulo 13"/>
+              <p:cNvSpPr>
+                <a:spLocks/>
+              </p:cNvSpPr>
+              <p:nvPr/>
+            </p:nvSpPr>
+            <p:spPr>
+              <a:xfrm>
+                <a:off x="4293227" y="5078475"/>
+                <a:ext cx="554055" cy="245731"/>
+              </a:xfrm>
+              <a:prstGeom prst="rect">
+                <a:avLst/>
+              </a:prstGeom>
+              <a:solidFill>
+                <a:schemeClr val="bg1">
+                  <a:alpha val="46000"/>
+                </a:schemeClr>
+              </a:solidFill>
+              <a:ln w="25400">
+                <a:solidFill>
+                  <a:schemeClr val="tx1"/>
+                </a:solidFill>
+              </a:ln>
+            </p:spPr>
+            <p:style>
+              <a:lnRef idx="2">
+                <a:schemeClr val="accent1">
+                  <a:shade val="50000"/>
+                </a:schemeClr>
+              </a:lnRef>
+              <a:fillRef idx="1">
+                <a:schemeClr val="accent1"/>
+              </a:fillRef>
+              <a:effectRef idx="0">
+                <a:schemeClr val="accent1"/>
+              </a:effectRef>
+              <a:fontRef idx="minor">
+                <a:schemeClr val="lt1"/>
+              </a:fontRef>
+            </p:style>
+            <p:txBody>
+              <a:bodyPr rtlCol="0" anchor="ctr"/>
+              <a:lstStyle/>
+              <a:p>
+                <a:pPr algn="ctr"/>
+                <a:r>
+                  <a:rPr lang="es-ES" sz="1400" dirty="0">
+                    <a:solidFill>
+                      <a:schemeClr val="tx1"/>
+                    </a:solidFill>
+                  </a:rPr>
+                  <a:t>SPI2</a:t>
+                </a:r>
+                <a:endParaRPr lang="es-ES" sz="1000" dirty="0">
+                  <a:solidFill>
+                    <a:schemeClr val="tx1"/>
+                  </a:solidFill>
+                </a:endParaRPr>
+              </a:p>
+            </p:txBody>
+          </p:sp>
+          <p:sp>
+            <p:nvSpPr>
+              <p:cNvPr id="15" name="Rectángulo 14"/>
+              <p:cNvSpPr>
+                <a:spLocks/>
+              </p:cNvSpPr>
+              <p:nvPr/>
+            </p:nvSpPr>
+            <p:spPr>
+              <a:xfrm>
+                <a:off x="4943747" y="5078475"/>
+                <a:ext cx="659589" cy="245731"/>
+              </a:xfrm>
+              <a:prstGeom prst="rect">
+                <a:avLst/>
+              </a:prstGeom>
+              <a:solidFill>
+                <a:schemeClr val="bg1">
+                  <a:alpha val="46000"/>
+                </a:schemeClr>
+              </a:solidFill>
+              <a:ln w="25400">
+                <a:solidFill>
+                  <a:schemeClr val="tx1"/>
+                </a:solidFill>
+              </a:ln>
+            </p:spPr>
+            <p:style>
+              <a:lnRef idx="2">
+                <a:schemeClr val="accent1">
+                  <a:shade val="50000"/>
+                </a:schemeClr>
+              </a:lnRef>
+              <a:fillRef idx="1">
+                <a:schemeClr val="accent1"/>
+              </a:fillRef>
+              <a:effectRef idx="0">
+                <a:schemeClr val="accent1"/>
+              </a:effectRef>
+              <a:fontRef idx="minor">
+                <a:schemeClr val="lt1"/>
+              </a:fontRef>
+            </p:style>
+            <p:txBody>
+              <a:bodyPr rtlCol="0" anchor="ctr"/>
+              <a:lstStyle/>
+              <a:p>
+                <a:pPr algn="ctr"/>
+                <a:r>
+                  <a:rPr lang="es-ES" sz="1400" dirty="0" err="1">
+                    <a:solidFill>
+                      <a:schemeClr val="tx1"/>
+                    </a:solidFill>
+                  </a:rPr>
+                  <a:t>Timer</a:t>
+                </a:r>
+                <a:endParaRPr lang="es-ES" sz="1000" dirty="0">
+                  <a:solidFill>
+                    <a:schemeClr val="tx1"/>
+                  </a:solidFill>
+                </a:endParaRPr>
+              </a:p>
+            </p:txBody>
+          </p:sp>
+          <p:sp>
+            <p:nvSpPr>
+              <p:cNvPr id="16" name="Rectángulo 15"/>
+              <p:cNvSpPr>
+                <a:spLocks/>
+              </p:cNvSpPr>
+              <p:nvPr/>
+            </p:nvSpPr>
+            <p:spPr>
+              <a:xfrm>
+                <a:off x="5699801" y="5078475"/>
+                <a:ext cx="606822" cy="245731"/>
+              </a:xfrm>
+              <a:prstGeom prst="rect">
+                <a:avLst/>
+              </a:prstGeom>
+              <a:solidFill>
+                <a:schemeClr val="bg1">
+                  <a:alpha val="46000"/>
+                </a:schemeClr>
+              </a:solidFill>
+              <a:ln w="25400">
+                <a:solidFill>
+                  <a:schemeClr val="tx1"/>
+                </a:solidFill>
+              </a:ln>
+            </p:spPr>
+            <p:style>
+              <a:lnRef idx="2">
+                <a:schemeClr val="accent1">
+                  <a:shade val="50000"/>
+                </a:schemeClr>
+              </a:lnRef>
+              <a:fillRef idx="1">
+                <a:schemeClr val="accent1"/>
+              </a:fillRef>
+              <a:effectRef idx="0">
+                <a:schemeClr val="accent1"/>
+              </a:effectRef>
+              <a:fontRef idx="minor">
+                <a:schemeClr val="lt1"/>
+              </a:fontRef>
+            </p:style>
+            <p:txBody>
+              <a:bodyPr rtlCol="0" anchor="ctr"/>
+              <a:lstStyle/>
+              <a:p>
+                <a:pPr algn="ctr"/>
+                <a:r>
+                  <a:rPr lang="es-ES" sz="1400" dirty="0">
+                    <a:solidFill>
+                      <a:schemeClr val="tx1"/>
+                    </a:solidFill>
+                  </a:rPr>
+                  <a:t>GPIO</a:t>
+                </a:r>
+                <a:endParaRPr lang="es-ES" sz="1000" dirty="0">
+                  <a:solidFill>
+                    <a:schemeClr val="tx1"/>
+                  </a:solidFill>
+                </a:endParaRPr>
+              </a:p>
+            </p:txBody>
+          </p:sp>
+          <p:sp>
+            <p:nvSpPr>
+              <p:cNvPr id="17" name="Rectángulo 16"/>
+              <p:cNvSpPr>
+                <a:spLocks/>
+              </p:cNvSpPr>
+              <p:nvPr/>
+            </p:nvSpPr>
+            <p:spPr>
+              <a:xfrm>
+                <a:off x="6403088" y="5078475"/>
+                <a:ext cx="606822" cy="245731"/>
+              </a:xfrm>
+              <a:prstGeom prst="rect">
+                <a:avLst/>
+              </a:prstGeom>
+              <a:noFill/>
+              <a:ln w="25400">
+                <a:solidFill>
+                  <a:schemeClr val="tx1"/>
+                </a:solidFill>
+              </a:ln>
+            </p:spPr>
+            <p:style>
+              <a:lnRef idx="2">
+                <a:schemeClr val="accent1">
+                  <a:shade val="50000"/>
+                </a:schemeClr>
+              </a:lnRef>
+              <a:fillRef idx="1">
+                <a:schemeClr val="accent1"/>
+              </a:fillRef>
+              <a:effectRef idx="0">
+                <a:schemeClr val="accent1"/>
+              </a:effectRef>
+              <a:fontRef idx="minor">
+                <a:schemeClr val="lt1"/>
+              </a:fontRef>
+            </p:style>
+            <p:txBody>
+              <a:bodyPr rtlCol="0" anchor="ctr"/>
+              <a:lstStyle/>
+              <a:p>
+                <a:pPr algn="ctr"/>
+                <a:r>
+                  <a:rPr lang="es-ES" sz="1400" dirty="0">
+                    <a:solidFill>
+                      <a:schemeClr val="tx1"/>
+                    </a:solidFill>
+                  </a:rPr>
+                  <a:t>UART</a:t>
+                </a:r>
+                <a:endParaRPr lang="es-ES" sz="1000" dirty="0">
+                  <a:solidFill>
+                    <a:schemeClr val="tx1"/>
+                  </a:solidFill>
+                </a:endParaRPr>
+              </a:p>
+            </p:txBody>
+          </p:sp>
+          <p:sp>
+            <p:nvSpPr>
+              <p:cNvPr id="18" name="Flecha arriba y abajo 17"/>
+              <p:cNvSpPr/>
+              <p:nvPr/>
+            </p:nvSpPr>
+            <p:spPr>
+              <a:xfrm>
+                <a:off x="4043307" y="4736904"/>
+                <a:ext cx="160555" cy="293188"/>
+              </a:xfrm>
+              <a:prstGeom prst="upDownArrow">
+                <a:avLst/>
+              </a:prstGeom>
+              <a:solidFill>
+                <a:schemeClr val="accent4">
+                  <a:lumMod val="60000"/>
+                  <a:lumOff val="40000"/>
+                </a:schemeClr>
+              </a:solidFill>
+            </p:spPr>
+            <p:style>
+              <a:lnRef idx="2">
+                <a:schemeClr val="accent1">
+                  <a:shade val="50000"/>
+                </a:schemeClr>
+              </a:lnRef>
+              <a:fillRef idx="1">
+                <a:schemeClr val="accent1"/>
+              </a:fillRef>
+              <a:effectRef idx="0">
+                <a:schemeClr val="accent1"/>
+              </a:effectRef>
+              <a:fontRef idx="minor">
+                <a:schemeClr val="lt1"/>
+              </a:fontRef>
+            </p:style>
+            <p:txBody>
+              <a:bodyPr rtlCol="0" anchor="ctr"/>
+              <a:lstStyle/>
+              <a:p>
+                <a:pPr algn="ctr"/>
+                <a:endParaRPr lang="es-ES"/>
+              </a:p>
+            </p:txBody>
+          </p:sp>
+          <p:sp>
+            <p:nvSpPr>
+              <p:cNvPr id="19" name="Flecha doblada 18"/>
+              <p:cNvSpPr/>
+              <p:nvPr/>
+            </p:nvSpPr>
+            <p:spPr>
+              <a:xfrm rot="10800000" flipH="1">
+                <a:off x="5001259" y="3661719"/>
+                <a:ext cx="2333812" cy="264909"/>
+              </a:xfrm>
+              <a:prstGeom prst="bentArrow">
+                <a:avLst>
+                  <a:gd name="adj1" fmla="val 20399"/>
+                  <a:gd name="adj2" fmla="val 25332"/>
+                  <a:gd name="adj3" fmla="val 34706"/>
+                  <a:gd name="adj4" fmla="val 43750"/>
+                </a:avLst>
+              </a:prstGeom>
+              <a:solidFill>
+                <a:schemeClr val="accent4">
+                  <a:lumMod val="60000"/>
+                  <a:lumOff val="40000"/>
+                </a:schemeClr>
+              </a:solidFill>
+            </p:spPr>
+            <p:style>
+              <a:lnRef idx="2">
+                <a:schemeClr val="accent1">
+                  <a:shade val="50000"/>
+                </a:schemeClr>
+              </a:lnRef>
+              <a:fillRef idx="1">
+                <a:schemeClr val="accent1"/>
+              </a:fillRef>
+              <a:effectRef idx="0">
+                <a:schemeClr val="accent1"/>
+              </a:effectRef>
+              <a:fontRef idx="minor">
+                <a:schemeClr val="lt1"/>
+              </a:fontRef>
+            </p:style>
+            <p:txBody>
+              <a:bodyPr rtlCol="0" anchor="ctr"/>
+              <a:lstStyle/>
+              <a:p>
+                <a:pPr algn="ctr"/>
+                <a:endParaRPr lang="es-ES">
+                  <a:solidFill>
+                    <a:schemeClr val="tx1"/>
+                  </a:solidFill>
+                </a:endParaRPr>
+              </a:p>
+            </p:txBody>
+          </p:sp>
+          <p:sp>
+            <p:nvSpPr>
+              <p:cNvPr id="20" name="Rectángulo 19"/>
+              <p:cNvSpPr/>
+              <p:nvPr/>
+            </p:nvSpPr>
+            <p:spPr>
+              <a:xfrm>
+                <a:off x="5728411" y="3561130"/>
+                <a:ext cx="1206677" cy="307777"/>
+              </a:xfrm>
+              <a:prstGeom prst="rect">
+                <a:avLst/>
+              </a:prstGeom>
+            </p:spPr>
+            <p:txBody>
+              <a:bodyPr wrap="none">
+                <a:spAutoFit/>
+              </a:bodyPr>
+              <a:lstStyle/>
+              <a:p>
+                <a:pPr algn="ctr"/>
+                <a:r>
+                  <a:rPr lang="es-ES" sz="1400" dirty="0">
+                    <a:solidFill>
+                      <a:schemeClr val="tx1"/>
+                    </a:solidFill>
+                  </a:rPr>
+                  <a:t>RAM </a:t>
+                </a:r>
+                <a:r>
+                  <a:rPr lang="es-ES" sz="1400" dirty="0" err="1">
+                    <a:solidFill>
+                      <a:schemeClr val="tx1"/>
+                    </a:solidFill>
+                  </a:rPr>
+                  <a:t>Memory</a:t>
+                </a:r>
+                <a:endParaRPr lang="es-ES" sz="1400" dirty="0">
+                  <a:solidFill>
+                    <a:schemeClr val="tx1"/>
+                  </a:solidFill>
+                </a:endParaRPr>
+              </a:p>
+            </p:txBody>
+          </p:sp>
+          <p:sp>
+            <p:nvSpPr>
+              <p:cNvPr id="3" name="Rectángulo 2"/>
+              <p:cNvSpPr/>
+              <p:nvPr/>
+            </p:nvSpPr>
+            <p:spPr>
+              <a:xfrm>
+                <a:off x="1237760" y="1850901"/>
+                <a:ext cx="5876925" cy="3607226"/>
+              </a:xfrm>
+              <a:prstGeom prst="rect">
+                <a:avLst/>
+              </a:prstGeom>
+              <a:noFill/>
+              <a:ln w="19050">
+                <a:solidFill>
+                  <a:schemeClr val="tx1"/>
+                </a:solidFill>
+              </a:ln>
+            </p:spPr>
+            <p:style>
+              <a:lnRef idx="2">
+                <a:schemeClr val="accent1">
+                  <a:shade val="50000"/>
+                </a:schemeClr>
+              </a:lnRef>
+              <a:fillRef idx="1">
+                <a:schemeClr val="accent1"/>
+              </a:fillRef>
+              <a:effectRef idx="0">
+                <a:schemeClr val="accent1"/>
+              </a:effectRef>
+              <a:fontRef idx="minor">
+                <a:schemeClr val="lt1"/>
+              </a:fontRef>
+            </p:style>
+            <p:txBody>
+              <a:bodyPr rtlCol="0" anchor="ctr"/>
+              <a:lstStyle/>
+              <a:p>
+                <a:pPr algn="ctr"/>
+                <a:endParaRPr lang="es-ES"/>
+              </a:p>
+            </p:txBody>
+          </p:sp>
+          <p:sp>
+            <p:nvSpPr>
+              <p:cNvPr id="21" name="CuadroTexto 20"/>
+              <p:cNvSpPr txBox="1"/>
+              <p:nvPr/>
+            </p:nvSpPr>
+            <p:spPr>
+              <a:xfrm>
+                <a:off x="1262892" y="1875105"/>
+                <a:ext cx="1831299" cy="400110"/>
+              </a:xfrm>
+              <a:prstGeom prst="rect">
+                <a:avLst/>
+              </a:prstGeom>
+              <a:noFill/>
+            </p:spPr>
+            <p:txBody>
+              <a:bodyPr wrap="square" rtlCol="0">
+                <a:spAutoFit/>
+              </a:bodyPr>
+              <a:lstStyle/>
+              <a:p>
+                <a:r>
+                  <a:rPr lang="es-ES" sz="2000" b="1" dirty="0" err="1"/>
+                  <a:t>VeeRwolfX</a:t>
+                </a:r>
+                <a:r>
+                  <a:rPr lang="es-ES" sz="2000" b="1" dirty="0"/>
+                  <a:t> </a:t>
+                </a:r>
+                <a:r>
+                  <a:rPr lang="es-ES" sz="2000" b="1" dirty="0" err="1"/>
+                  <a:t>SoC</a:t>
+                </a:r>
+                <a:endParaRPr lang="es-ES" sz="2000" b="1" dirty="0"/>
+              </a:p>
+            </p:txBody>
+          </p:sp>
+          <p:cxnSp>
+            <p:nvCxnSpPr>
+              <p:cNvPr id="22" name="Conector recto de flecha 21"/>
+              <p:cNvCxnSpPr/>
+              <p:nvPr/>
+            </p:nvCxnSpPr>
+            <p:spPr>
+              <a:xfrm flipV="1">
+                <a:off x="2913796" y="5324207"/>
+                <a:ext cx="0" cy="864000"/>
+              </a:xfrm>
+              <a:prstGeom prst="straightConnector1">
+                <a:avLst/>
+              </a:prstGeom>
+              <a:ln w="25400">
+                <a:solidFill>
+                  <a:schemeClr val="tx1"/>
+                </a:solidFill>
+                <a:headEnd type="triangle" w="lg" len="med"/>
+                <a:tailEnd type="none" w="lg" len="med"/>
+              </a:ln>
+            </p:spPr>
+            <p:style>
+              <a:lnRef idx="1">
+                <a:schemeClr val="accent1"/>
+              </a:lnRef>
+              <a:fillRef idx="0">
+                <a:schemeClr val="accent1"/>
+              </a:fillRef>
+              <a:effectRef idx="0">
+                <a:schemeClr val="accent1"/>
+              </a:effectRef>
+              <a:fontRef idx="minor">
+                <a:schemeClr val="tx1"/>
+              </a:fontRef>
+            </p:style>
+          </p:cxnSp>
           <p:pic>
             <p:nvPicPr>
-              <p:cNvPr id="38" name="Imagen 37"/>
+              <p:cNvPr id="26" name="Imagen 25"/>
               <p:cNvPicPr>
                 <a:picLocks noChangeAspect="1"/>
               </p:cNvPicPr>
               <p:nvPr/>
             </p:nvPicPr>
             <p:blipFill>
-              <a:blip r:embed="rId4"/>
+              <a:blip r:embed="rId2"/>
               <a:stretch>
                 <a:fillRect/>
               </a:stretch>
             </p:blipFill>
             <p:spPr>
               <a:xfrm>
-                <a:off x="7311402" y="5697451"/>
-                <a:ext cx="647439" cy="647439"/>
+                <a:off x="1731165" y="6255374"/>
+                <a:ext cx="1605979" cy="264026"/>
               </a:xfrm>
               <a:prstGeom prst="rect">
                 <a:avLst/>
               </a:prstGeom>
             </p:spPr>
           </p:pic>
+          <p:cxnSp>
+            <p:nvCxnSpPr>
+              <p:cNvPr id="31" name="Conector recto de flecha 30"/>
+              <p:cNvCxnSpPr/>
+              <p:nvPr/>
+            </p:nvCxnSpPr>
+            <p:spPr>
+              <a:xfrm flipV="1">
+                <a:off x="3919734" y="5316703"/>
+                <a:ext cx="0" cy="339386"/>
+              </a:xfrm>
+              <a:prstGeom prst="straightConnector1">
+                <a:avLst/>
+              </a:prstGeom>
+              <a:ln w="25400">
+                <a:solidFill>
+                  <a:schemeClr val="tx1"/>
+                </a:solidFill>
+                <a:headEnd type="triangle" w="lg" len="med"/>
+                <a:tailEnd type="triangle" w="lg" len="med"/>
+              </a:ln>
+            </p:spPr>
+            <p:style>
+              <a:lnRef idx="1">
+                <a:schemeClr val="accent1"/>
+              </a:lnRef>
+              <a:fillRef idx="0">
+                <a:schemeClr val="accent1"/>
+              </a:fillRef>
+              <a:effectRef idx="0">
+                <a:schemeClr val="accent1"/>
+              </a:effectRef>
+              <a:fontRef idx="minor">
+                <a:schemeClr val="tx1"/>
+              </a:fontRef>
+            </p:style>
+          </p:cxnSp>
+          <p:cxnSp>
+            <p:nvCxnSpPr>
+              <p:cNvPr id="35" name="Conector recto de flecha 34"/>
+              <p:cNvCxnSpPr/>
+              <p:nvPr/>
+            </p:nvCxnSpPr>
+            <p:spPr>
+              <a:xfrm flipV="1">
+                <a:off x="4570254" y="5324207"/>
+                <a:ext cx="0" cy="737235"/>
+              </a:xfrm>
+              <a:prstGeom prst="straightConnector1">
+                <a:avLst/>
+              </a:prstGeom>
+              <a:ln w="25400">
+                <a:solidFill>
+                  <a:schemeClr val="tx1"/>
+                </a:solidFill>
+                <a:headEnd type="triangle" w="lg" len="med"/>
+                <a:tailEnd type="triangle" w="lg" len="med"/>
+              </a:ln>
+            </p:spPr>
+            <p:style>
+              <a:lnRef idx="1">
+                <a:schemeClr val="accent1"/>
+              </a:lnRef>
+              <a:fillRef idx="0">
+                <a:schemeClr val="accent1"/>
+              </a:fillRef>
+              <a:effectRef idx="0">
+                <a:schemeClr val="accent1"/>
+              </a:effectRef>
+              <a:fontRef idx="minor">
+                <a:schemeClr val="tx1"/>
+              </a:fontRef>
+            </p:style>
+          </p:cxnSp>
+          <p:grpSp>
+            <p:nvGrpSpPr>
+              <p:cNvPr id="43" name="Grupo 42"/>
+              <p:cNvGrpSpPr/>
+              <p:nvPr/>
+            </p:nvGrpSpPr>
+            <p:grpSpPr>
+              <a:xfrm>
+                <a:off x="5491415" y="6088617"/>
+                <a:ext cx="1045773" cy="647439"/>
+                <a:chOff x="7311402" y="5697451"/>
+                <a:chExt cx="1045773" cy="647439"/>
+              </a:xfrm>
+            </p:grpSpPr>
+            <p:pic>
+              <p:nvPicPr>
+                <p:cNvPr id="38" name="Imagen 37"/>
+                <p:cNvPicPr>
+                  <a:picLocks noChangeAspect="1"/>
+                </p:cNvPicPr>
+                <p:nvPr/>
+              </p:nvPicPr>
+              <p:blipFill>
+                <a:blip r:embed="rId3"/>
+                <a:stretch>
+                  <a:fillRect/>
+                </a:stretch>
+              </p:blipFill>
+              <p:spPr>
+                <a:xfrm>
+                  <a:off x="7311402" y="5697451"/>
+                  <a:ext cx="647439" cy="647439"/>
+                </a:xfrm>
+                <a:prstGeom prst="rect">
+                  <a:avLst/>
+                </a:prstGeom>
+              </p:spPr>
+            </p:pic>
+            <p:pic>
+              <p:nvPicPr>
+                <p:cNvPr id="39" name="Imagen 38"/>
+                <p:cNvPicPr>
+                  <a:picLocks noChangeAspect="1"/>
+                </p:cNvPicPr>
+                <p:nvPr/>
+              </p:nvPicPr>
+              <p:blipFill>
+                <a:blip r:embed="rId4"/>
+                <a:stretch>
+                  <a:fillRect/>
+                </a:stretch>
+              </p:blipFill>
+              <p:spPr>
+                <a:xfrm>
+                  <a:off x="7667926" y="5779620"/>
+                  <a:ext cx="689249" cy="541744"/>
+                </a:xfrm>
+                <a:prstGeom prst="rect">
+                  <a:avLst/>
+                </a:prstGeom>
+              </p:spPr>
+            </p:pic>
+          </p:grpSp>
+          <p:cxnSp>
+            <p:nvCxnSpPr>
+              <p:cNvPr id="40" name="Conector recto de flecha 39"/>
+              <p:cNvCxnSpPr/>
+              <p:nvPr/>
+            </p:nvCxnSpPr>
+            <p:spPr>
+              <a:xfrm flipV="1">
+                <a:off x="6003212" y="5324207"/>
+                <a:ext cx="1418" cy="822076"/>
+              </a:xfrm>
+              <a:prstGeom prst="straightConnector1">
+                <a:avLst/>
+              </a:prstGeom>
+              <a:ln w="25400">
+                <a:solidFill>
+                  <a:schemeClr val="tx1"/>
+                </a:solidFill>
+                <a:headEnd type="triangle" w="lg" len="med"/>
+                <a:tailEnd type="triangle" w="lg" len="med"/>
+              </a:ln>
+            </p:spPr>
+            <p:style>
+              <a:lnRef idx="1">
+                <a:schemeClr val="accent1"/>
+              </a:lnRef>
+              <a:fillRef idx="0">
+                <a:schemeClr val="accent1"/>
+              </a:fillRef>
+              <a:effectRef idx="0">
+                <a:schemeClr val="accent1"/>
+              </a:effectRef>
+              <a:fontRef idx="minor">
+                <a:schemeClr val="tx1"/>
+              </a:fontRef>
+            </p:style>
+          </p:cxnSp>
           <p:pic>
             <p:nvPicPr>
-              <p:cNvPr id="39" name="Imagen 38"/>
+              <p:cNvPr id="50" name="Imagen 49"/>
               <p:cNvPicPr>
                 <a:picLocks noChangeAspect="1"/>
               </p:cNvPicPr>
@@ -5184,8 +5242,1632 @@
             </p:blipFill>
             <p:spPr>
               <a:xfrm>
-                <a:off x="7667926" y="5779620"/>
-                <a:ext cx="689249" cy="541744"/>
+                <a:off x="7156273" y="5016615"/>
+                <a:ext cx="616369" cy="430480"/>
+              </a:xfrm>
+              <a:prstGeom prst="rect">
+                <a:avLst/>
+              </a:prstGeom>
+            </p:spPr>
+          </p:pic>
+          <p:cxnSp>
+            <p:nvCxnSpPr>
+              <p:cNvPr id="54" name="Conector recto 53"/>
+              <p:cNvCxnSpPr/>
+              <p:nvPr/>
+            </p:nvCxnSpPr>
+            <p:spPr>
+              <a:xfrm>
+                <a:off x="7019435" y="5231855"/>
+                <a:ext cx="127313" cy="0"/>
+              </a:xfrm>
+              <a:prstGeom prst="line">
+                <a:avLst/>
+              </a:prstGeom>
+              <a:ln w="25400">
+                <a:solidFill>
+                  <a:srgbClr val="221E7A"/>
+                </a:solidFill>
+              </a:ln>
+            </p:spPr>
+            <p:style>
+              <a:lnRef idx="1">
+                <a:schemeClr val="accent1"/>
+              </a:lnRef>
+              <a:fillRef idx="0">
+                <a:schemeClr val="accent1"/>
+              </a:fillRef>
+              <a:effectRef idx="0">
+                <a:schemeClr val="accent1"/>
+              </a:effectRef>
+              <a:fontRef idx="minor">
+                <a:schemeClr val="tx1"/>
+              </a:fontRef>
+            </p:style>
+          </p:cxnSp>
+          <p:pic>
+            <p:nvPicPr>
+              <p:cNvPr id="56" name="Imagen 55"/>
+              <p:cNvPicPr>
+                <a:picLocks noChangeAspect="1"/>
+              </p:cNvPicPr>
+              <p:nvPr/>
+            </p:nvPicPr>
+            <p:blipFill>
+              <a:blip r:embed="rId6"/>
+              <a:stretch>
+                <a:fillRect/>
+              </a:stretch>
+            </p:blipFill>
+            <p:spPr>
+              <a:xfrm>
+                <a:off x="9176718" y="3808433"/>
+                <a:ext cx="997269" cy="974750"/>
+              </a:xfrm>
+              <a:prstGeom prst="rect">
+                <a:avLst/>
+              </a:prstGeom>
+            </p:spPr>
+          </p:pic>
+          <p:sp>
+            <p:nvSpPr>
+              <p:cNvPr id="58" name="Rectángulo redondeado 57"/>
+              <p:cNvSpPr/>
+              <p:nvPr/>
+            </p:nvSpPr>
+            <p:spPr>
+              <a:xfrm>
+                <a:off x="7345786" y="3556356"/>
+                <a:ext cx="1374309" cy="619065"/>
+              </a:xfrm>
+              <a:prstGeom prst="roundRect">
+                <a:avLst/>
+              </a:prstGeom>
+              <a:solidFill>
+                <a:srgbClr val="FFFF99"/>
+              </a:solidFill>
+            </p:spPr>
+            <p:style>
+              <a:lnRef idx="2">
+                <a:schemeClr val="accent1">
+                  <a:shade val="50000"/>
+                </a:schemeClr>
+              </a:lnRef>
+              <a:fillRef idx="1">
+                <a:schemeClr val="accent1"/>
+              </a:fillRef>
+              <a:effectRef idx="0">
+                <a:schemeClr val="accent1"/>
+              </a:effectRef>
+              <a:fontRef idx="minor">
+                <a:schemeClr val="lt1"/>
+              </a:fontRef>
+            </p:style>
+            <p:txBody>
+              <a:bodyPr rtlCol="0" anchor="ctr"/>
+              <a:lstStyle/>
+              <a:p>
+                <a:pPr algn="ctr"/>
+                <a:r>
+                  <a:rPr lang="es-ES" sz="2000" b="1" dirty="0">
+                    <a:solidFill>
+                      <a:schemeClr val="tx1"/>
+                    </a:solidFill>
+                  </a:rPr>
+                  <a:t>Lite DRAM </a:t>
+                </a:r>
+                <a:r>
+                  <a:rPr lang="es-ES" sz="2000" b="1" dirty="0" err="1">
+                    <a:solidFill>
+                      <a:schemeClr val="tx1"/>
+                    </a:solidFill>
+                  </a:rPr>
+                  <a:t>controller</a:t>
+                </a:r>
+                <a:endParaRPr lang="es-ES" sz="2000" b="1" dirty="0">
+                  <a:solidFill>
+                    <a:schemeClr val="tx1"/>
+                  </a:solidFill>
+                </a:endParaRPr>
+              </a:p>
+            </p:txBody>
+          </p:sp>
+          <p:sp>
+            <p:nvSpPr>
+              <p:cNvPr id="59" name="Flecha derecha 58"/>
+              <p:cNvSpPr/>
+              <p:nvPr/>
+            </p:nvSpPr>
+            <p:spPr>
+              <a:xfrm>
+                <a:off x="8762961" y="3975641"/>
+                <a:ext cx="348796" cy="184838"/>
+              </a:xfrm>
+              <a:prstGeom prst="rightArrow">
+                <a:avLst/>
+              </a:prstGeom>
+              <a:solidFill>
+                <a:schemeClr val="accent4">
+                  <a:lumMod val="60000"/>
+                  <a:lumOff val="40000"/>
+                </a:schemeClr>
+              </a:solidFill>
+            </p:spPr>
+            <p:style>
+              <a:lnRef idx="2">
+                <a:schemeClr val="accent1">
+                  <a:shade val="50000"/>
+                </a:schemeClr>
+              </a:lnRef>
+              <a:fillRef idx="1">
+                <a:schemeClr val="accent1"/>
+              </a:fillRef>
+              <a:effectRef idx="0">
+                <a:schemeClr val="accent1"/>
+              </a:effectRef>
+              <a:fontRef idx="minor">
+                <a:schemeClr val="lt1"/>
+              </a:fontRef>
+            </p:style>
+            <p:txBody>
+              <a:bodyPr rtlCol="0" anchor="ctr"/>
+              <a:lstStyle/>
+              <a:p>
+                <a:pPr algn="ctr"/>
+                <a:endParaRPr lang="es-ES">
+                  <a:solidFill>
+                    <a:schemeClr val="tx1"/>
+                  </a:solidFill>
+                </a:endParaRPr>
+              </a:p>
+            </p:txBody>
+          </p:sp>
+          <p:pic>
+            <p:nvPicPr>
+              <p:cNvPr id="60" name="Imagen 59"/>
+              <p:cNvPicPr>
+                <a:picLocks noChangeAspect="1"/>
+              </p:cNvPicPr>
+              <p:nvPr/>
+            </p:nvPicPr>
+            <p:blipFill>
+              <a:blip r:embed="rId7"/>
+              <a:stretch>
+                <a:fillRect/>
+              </a:stretch>
+            </p:blipFill>
+            <p:spPr>
+              <a:xfrm>
+                <a:off x="3548436" y="5687818"/>
+                <a:ext cx="747359" cy="667640"/>
+              </a:xfrm>
+              <a:prstGeom prst="rect">
+                <a:avLst/>
+              </a:prstGeom>
+            </p:spPr>
+          </p:pic>
+          <p:sp>
+            <p:nvSpPr>
+              <p:cNvPr id="41" name="Rectángulo redondeado 40"/>
+              <p:cNvSpPr/>
+              <p:nvPr/>
+            </p:nvSpPr>
+            <p:spPr>
+              <a:xfrm>
+                <a:off x="7291020" y="2059939"/>
+                <a:ext cx="1360118" cy="426001"/>
+              </a:xfrm>
+              <a:prstGeom prst="roundRect">
+                <a:avLst/>
+              </a:prstGeom>
+              <a:solidFill>
+                <a:srgbClr val="FFFF99"/>
+              </a:solidFill>
+            </p:spPr>
+            <p:style>
+              <a:lnRef idx="2">
+                <a:schemeClr val="accent1">
+                  <a:shade val="50000"/>
+                </a:schemeClr>
+              </a:lnRef>
+              <a:fillRef idx="1">
+                <a:schemeClr val="accent1"/>
+              </a:fillRef>
+              <a:effectRef idx="0">
+                <a:schemeClr val="accent1"/>
+              </a:effectRef>
+              <a:fontRef idx="minor">
+                <a:schemeClr val="lt1"/>
+              </a:fontRef>
+            </p:style>
+            <p:txBody>
+              <a:bodyPr rtlCol="0" anchor="ctr"/>
+              <a:lstStyle/>
+              <a:p>
+                <a:pPr algn="ctr"/>
+                <a:r>
+                  <a:rPr lang="es-ES" sz="2000" b="1" dirty="0" err="1">
+                    <a:solidFill>
+                      <a:schemeClr val="tx1"/>
+                    </a:solidFill>
+                  </a:rPr>
+                  <a:t>bscan</a:t>
+                </a:r>
+                <a:r>
+                  <a:rPr lang="es-ES" sz="2000" b="1" dirty="0">
+                    <a:solidFill>
+                      <a:schemeClr val="tx1"/>
+                    </a:solidFill>
+                  </a:rPr>
+                  <a:t> TAP</a:t>
+                </a:r>
+              </a:p>
+            </p:txBody>
+          </p:sp>
+          <p:cxnSp>
+            <p:nvCxnSpPr>
+              <p:cNvPr id="49" name="Conector recto 48"/>
+              <p:cNvCxnSpPr/>
+              <p:nvPr/>
+            </p:nvCxnSpPr>
+            <p:spPr>
+              <a:xfrm>
+                <a:off x="5215158" y="2734488"/>
+                <a:ext cx="788054" cy="0"/>
+              </a:xfrm>
+              <a:prstGeom prst="line">
+                <a:avLst/>
+              </a:prstGeom>
+              <a:ln w="25400">
+                <a:solidFill>
+                  <a:srgbClr val="221E7A"/>
+                </a:solidFill>
+              </a:ln>
+            </p:spPr>
+            <p:style>
+              <a:lnRef idx="1">
+                <a:schemeClr val="accent1"/>
+              </a:lnRef>
+              <a:fillRef idx="0">
+                <a:schemeClr val="accent1"/>
+              </a:fillRef>
+              <a:effectRef idx="0">
+                <a:schemeClr val="accent1"/>
+              </a:effectRef>
+              <a:fontRef idx="minor">
+                <a:schemeClr val="tx1"/>
+              </a:fontRef>
+            </p:style>
+          </p:cxnSp>
+          <p:pic>
+            <p:nvPicPr>
+              <p:cNvPr id="51" name="Imagen 50"/>
+              <p:cNvPicPr>
+                <a:picLocks noChangeAspect="1"/>
+              </p:cNvPicPr>
+              <p:nvPr/>
+            </p:nvPicPr>
+            <p:blipFill>
+              <a:blip r:embed="rId8"/>
+              <a:stretch>
+                <a:fillRect/>
+              </a:stretch>
+            </p:blipFill>
+            <p:spPr>
+              <a:xfrm>
+                <a:off x="7753592" y="4828967"/>
+                <a:ext cx="1020374" cy="799427"/>
+              </a:xfrm>
+              <a:prstGeom prst="rect">
+                <a:avLst/>
+              </a:prstGeom>
+            </p:spPr>
+          </p:pic>
+          <p:sp>
+            <p:nvSpPr>
+              <p:cNvPr id="42" name="Rectángulo redondeado 41"/>
+              <p:cNvSpPr/>
+              <p:nvPr/>
+            </p:nvSpPr>
+            <p:spPr>
+              <a:xfrm>
+                <a:off x="4615618" y="611292"/>
+                <a:ext cx="1360118" cy="621066"/>
+              </a:xfrm>
+              <a:prstGeom prst="roundRect">
+                <a:avLst/>
+              </a:prstGeom>
+              <a:solidFill>
+                <a:srgbClr val="FFFF99"/>
+              </a:solidFill>
+            </p:spPr>
+            <p:style>
+              <a:lnRef idx="2">
+                <a:schemeClr val="accent1">
+                  <a:shade val="50000"/>
+                </a:schemeClr>
+              </a:lnRef>
+              <a:fillRef idx="1">
+                <a:schemeClr val="accent1"/>
+              </a:fillRef>
+              <a:effectRef idx="0">
+                <a:schemeClr val="accent1"/>
+              </a:effectRef>
+              <a:fontRef idx="minor">
+                <a:schemeClr val="lt1"/>
+              </a:fontRef>
+            </p:style>
+            <p:txBody>
+              <a:bodyPr rtlCol="0" anchor="ctr"/>
+              <a:lstStyle/>
+              <a:p>
+                <a:pPr algn="ctr"/>
+                <a:r>
+                  <a:rPr lang="es-ES" sz="2000" b="1" dirty="0" err="1">
+                    <a:solidFill>
+                      <a:schemeClr val="tx1"/>
+                    </a:solidFill>
+                  </a:rPr>
+                  <a:t>Clock</a:t>
+                </a:r>
+                <a:r>
+                  <a:rPr lang="es-ES" sz="2000" b="1" dirty="0">
+                    <a:solidFill>
+                      <a:schemeClr val="tx1"/>
+                    </a:solidFill>
+                  </a:rPr>
+                  <a:t> </a:t>
+                </a:r>
+                <a:r>
+                  <a:rPr lang="es-ES" sz="2000" b="1" dirty="0" err="1">
+                    <a:solidFill>
+                      <a:schemeClr val="tx1"/>
+                    </a:solidFill>
+                  </a:rPr>
+                  <a:t>Generator</a:t>
+                </a:r>
+                <a:endParaRPr lang="es-ES" sz="2000" b="1" dirty="0">
+                  <a:solidFill>
+                    <a:schemeClr val="tx1"/>
+                  </a:solidFill>
+                </a:endParaRPr>
+              </a:p>
+            </p:txBody>
+          </p:sp>
+          <p:cxnSp>
+            <p:nvCxnSpPr>
+              <p:cNvPr id="23" name="Conector recto de flecha 22"/>
+              <p:cNvCxnSpPr/>
+              <p:nvPr/>
+            </p:nvCxnSpPr>
+            <p:spPr>
+              <a:xfrm flipH="1">
+                <a:off x="5963653" y="921825"/>
+                <a:ext cx="4127860" cy="0"/>
+              </a:xfrm>
+              <a:prstGeom prst="straightConnector1">
+                <a:avLst/>
+              </a:prstGeom>
+              <a:ln w="25400">
+                <a:solidFill>
+                  <a:schemeClr val="tx1"/>
+                </a:solidFill>
+                <a:tailEnd type="triangle" w="lg" len="lg"/>
+              </a:ln>
+            </p:spPr>
+            <p:style>
+              <a:lnRef idx="1">
+                <a:schemeClr val="accent1"/>
+              </a:lnRef>
+              <a:fillRef idx="0">
+                <a:schemeClr val="accent1"/>
+              </a:fillRef>
+              <a:effectRef idx="0">
+                <a:schemeClr val="accent1"/>
+              </a:effectRef>
+              <a:fontRef idx="minor">
+                <a:schemeClr val="tx1"/>
+              </a:fontRef>
+            </p:style>
+          </p:cxnSp>
+          <p:sp>
+            <p:nvSpPr>
+              <p:cNvPr id="25" name="CuadroTexto 24"/>
+              <p:cNvSpPr txBox="1"/>
+              <p:nvPr/>
+            </p:nvSpPr>
+            <p:spPr>
+              <a:xfrm>
+                <a:off x="8267011" y="351472"/>
+                <a:ext cx="1021433" cy="369332"/>
+              </a:xfrm>
+              <a:prstGeom prst="rect">
+                <a:avLst/>
+              </a:prstGeom>
+              <a:noFill/>
+            </p:spPr>
+            <p:txBody>
+              <a:bodyPr wrap="none" rtlCol="0">
+                <a:spAutoFit/>
+              </a:bodyPr>
+              <a:lstStyle/>
+              <a:p>
+                <a:r>
+                  <a:rPr lang="es-ES" dirty="0"/>
+                  <a:t>100 MHz</a:t>
+                </a:r>
+              </a:p>
+            </p:txBody>
+          </p:sp>
+          <p:cxnSp>
+            <p:nvCxnSpPr>
+              <p:cNvPr id="28" name="Conector recto 27"/>
+              <p:cNvCxnSpPr/>
+              <p:nvPr/>
+            </p:nvCxnSpPr>
+            <p:spPr>
+              <a:xfrm>
+                <a:off x="7189476" y="626138"/>
+                <a:ext cx="179993" cy="0"/>
+              </a:xfrm>
+              <a:prstGeom prst="line">
+                <a:avLst/>
+              </a:prstGeom>
+              <a:ln>
+                <a:solidFill>
+                  <a:schemeClr val="tx1"/>
+                </a:solidFill>
+              </a:ln>
+            </p:spPr>
+            <p:style>
+              <a:lnRef idx="1">
+                <a:schemeClr val="accent1"/>
+              </a:lnRef>
+              <a:fillRef idx="0">
+                <a:schemeClr val="accent1"/>
+              </a:fillRef>
+              <a:effectRef idx="0">
+                <a:schemeClr val="accent1"/>
+              </a:effectRef>
+              <a:fontRef idx="minor">
+                <a:schemeClr val="tx1"/>
+              </a:fontRef>
+            </p:style>
+          </p:cxnSp>
+          <p:cxnSp>
+            <p:nvCxnSpPr>
+              <p:cNvPr id="47" name="Conector recto 46"/>
+              <p:cNvCxnSpPr/>
+              <p:nvPr/>
+            </p:nvCxnSpPr>
+            <p:spPr>
+              <a:xfrm flipV="1">
+                <a:off x="7369469" y="448337"/>
+                <a:ext cx="0" cy="180000"/>
+              </a:xfrm>
+              <a:prstGeom prst="line">
+                <a:avLst/>
+              </a:prstGeom>
+              <a:ln>
+                <a:solidFill>
+                  <a:schemeClr val="tx1"/>
+                </a:solidFill>
+              </a:ln>
+            </p:spPr>
+            <p:style>
+              <a:lnRef idx="1">
+                <a:schemeClr val="accent1"/>
+              </a:lnRef>
+              <a:fillRef idx="0">
+                <a:schemeClr val="accent1"/>
+              </a:fillRef>
+              <a:effectRef idx="0">
+                <a:schemeClr val="accent1"/>
+              </a:effectRef>
+              <a:fontRef idx="minor">
+                <a:schemeClr val="tx1"/>
+              </a:fontRef>
+            </p:style>
+          </p:cxnSp>
+          <p:cxnSp>
+            <p:nvCxnSpPr>
+              <p:cNvPr id="52" name="Conector recto 51"/>
+              <p:cNvCxnSpPr/>
+              <p:nvPr/>
+            </p:nvCxnSpPr>
+            <p:spPr>
+              <a:xfrm>
+                <a:off x="7369469" y="448337"/>
+                <a:ext cx="179993" cy="0"/>
+              </a:xfrm>
+              <a:prstGeom prst="line">
+                <a:avLst/>
+              </a:prstGeom>
+              <a:ln>
+                <a:solidFill>
+                  <a:schemeClr val="tx1"/>
+                </a:solidFill>
+              </a:ln>
+            </p:spPr>
+            <p:style>
+              <a:lnRef idx="1">
+                <a:schemeClr val="accent1"/>
+              </a:lnRef>
+              <a:fillRef idx="0">
+                <a:schemeClr val="accent1"/>
+              </a:fillRef>
+              <a:effectRef idx="0">
+                <a:schemeClr val="accent1"/>
+              </a:effectRef>
+              <a:fontRef idx="minor">
+                <a:schemeClr val="tx1"/>
+              </a:fontRef>
+            </p:style>
+          </p:cxnSp>
+          <p:cxnSp>
+            <p:nvCxnSpPr>
+              <p:cNvPr id="55" name="Conector recto 54"/>
+              <p:cNvCxnSpPr/>
+              <p:nvPr/>
+            </p:nvCxnSpPr>
+            <p:spPr>
+              <a:xfrm flipV="1">
+                <a:off x="7549462" y="446138"/>
+                <a:ext cx="0" cy="180000"/>
+              </a:xfrm>
+              <a:prstGeom prst="line">
+                <a:avLst/>
+              </a:prstGeom>
+              <a:ln>
+                <a:solidFill>
+                  <a:schemeClr val="tx1"/>
+                </a:solidFill>
+              </a:ln>
+            </p:spPr>
+            <p:style>
+              <a:lnRef idx="1">
+                <a:schemeClr val="accent1"/>
+              </a:lnRef>
+              <a:fillRef idx="0">
+                <a:schemeClr val="accent1"/>
+              </a:fillRef>
+              <a:effectRef idx="0">
+                <a:schemeClr val="accent1"/>
+              </a:effectRef>
+              <a:fontRef idx="minor">
+                <a:schemeClr val="tx1"/>
+              </a:fontRef>
+            </p:style>
+          </p:cxnSp>
+          <p:cxnSp>
+            <p:nvCxnSpPr>
+              <p:cNvPr id="61" name="Conector recto 60"/>
+              <p:cNvCxnSpPr/>
+              <p:nvPr/>
+            </p:nvCxnSpPr>
+            <p:spPr>
+              <a:xfrm>
+                <a:off x="7549462" y="626138"/>
+                <a:ext cx="179993" cy="0"/>
+              </a:xfrm>
+              <a:prstGeom prst="line">
+                <a:avLst/>
+              </a:prstGeom>
+              <a:ln>
+                <a:solidFill>
+                  <a:schemeClr val="tx1"/>
+                </a:solidFill>
+              </a:ln>
+            </p:spPr>
+            <p:style>
+              <a:lnRef idx="1">
+                <a:schemeClr val="accent1"/>
+              </a:lnRef>
+              <a:fillRef idx="0">
+                <a:schemeClr val="accent1"/>
+              </a:fillRef>
+              <a:effectRef idx="0">
+                <a:schemeClr val="accent1"/>
+              </a:effectRef>
+              <a:fontRef idx="minor">
+                <a:schemeClr val="tx1"/>
+              </a:fontRef>
+            </p:style>
+          </p:cxnSp>
+          <p:cxnSp>
+            <p:nvCxnSpPr>
+              <p:cNvPr id="62" name="Conector recto 61"/>
+              <p:cNvCxnSpPr/>
+              <p:nvPr/>
+            </p:nvCxnSpPr>
+            <p:spPr>
+              <a:xfrm flipV="1">
+                <a:off x="7729455" y="446138"/>
+                <a:ext cx="0" cy="180000"/>
+              </a:xfrm>
+              <a:prstGeom prst="line">
+                <a:avLst/>
+              </a:prstGeom>
+              <a:ln>
+                <a:solidFill>
+                  <a:schemeClr val="tx1"/>
+                </a:solidFill>
+              </a:ln>
+            </p:spPr>
+            <p:style>
+              <a:lnRef idx="1">
+                <a:schemeClr val="accent1"/>
+              </a:lnRef>
+              <a:fillRef idx="0">
+                <a:schemeClr val="accent1"/>
+              </a:fillRef>
+              <a:effectRef idx="0">
+                <a:schemeClr val="accent1"/>
+              </a:effectRef>
+              <a:fontRef idx="minor">
+                <a:schemeClr val="tx1"/>
+              </a:fontRef>
+            </p:style>
+          </p:cxnSp>
+          <p:cxnSp>
+            <p:nvCxnSpPr>
+              <p:cNvPr id="63" name="Conector recto 62"/>
+              <p:cNvCxnSpPr/>
+              <p:nvPr/>
+            </p:nvCxnSpPr>
+            <p:spPr>
+              <a:xfrm>
+                <a:off x="7729455" y="446138"/>
+                <a:ext cx="179993" cy="0"/>
+              </a:xfrm>
+              <a:prstGeom prst="line">
+                <a:avLst/>
+              </a:prstGeom>
+              <a:ln>
+                <a:solidFill>
+                  <a:schemeClr val="tx1"/>
+                </a:solidFill>
+              </a:ln>
+            </p:spPr>
+            <p:style>
+              <a:lnRef idx="1">
+                <a:schemeClr val="accent1"/>
+              </a:lnRef>
+              <a:fillRef idx="0">
+                <a:schemeClr val="accent1"/>
+              </a:fillRef>
+              <a:effectRef idx="0">
+                <a:schemeClr val="accent1"/>
+              </a:effectRef>
+              <a:fontRef idx="minor">
+                <a:schemeClr val="tx1"/>
+              </a:fontRef>
+            </p:style>
+          </p:cxnSp>
+          <p:cxnSp>
+            <p:nvCxnSpPr>
+              <p:cNvPr id="64" name="Conector recto 63"/>
+              <p:cNvCxnSpPr/>
+              <p:nvPr/>
+            </p:nvCxnSpPr>
+            <p:spPr>
+              <a:xfrm flipV="1">
+                <a:off x="7908237" y="446138"/>
+                <a:ext cx="0" cy="180000"/>
+              </a:xfrm>
+              <a:prstGeom prst="line">
+                <a:avLst/>
+              </a:prstGeom>
+              <a:ln>
+                <a:solidFill>
+                  <a:schemeClr val="tx1"/>
+                </a:solidFill>
+              </a:ln>
+            </p:spPr>
+            <p:style>
+              <a:lnRef idx="1">
+                <a:schemeClr val="accent1"/>
+              </a:lnRef>
+              <a:fillRef idx="0">
+                <a:schemeClr val="accent1"/>
+              </a:fillRef>
+              <a:effectRef idx="0">
+                <a:schemeClr val="accent1"/>
+              </a:effectRef>
+              <a:fontRef idx="minor">
+                <a:schemeClr val="tx1"/>
+              </a:fontRef>
+            </p:style>
+          </p:cxnSp>
+          <p:cxnSp>
+            <p:nvCxnSpPr>
+              <p:cNvPr id="65" name="Conector recto 64"/>
+              <p:cNvCxnSpPr/>
+              <p:nvPr/>
+            </p:nvCxnSpPr>
+            <p:spPr>
+              <a:xfrm>
+                <a:off x="7908237" y="626138"/>
+                <a:ext cx="179993" cy="0"/>
+              </a:xfrm>
+              <a:prstGeom prst="line">
+                <a:avLst/>
+              </a:prstGeom>
+              <a:ln>
+                <a:solidFill>
+                  <a:schemeClr val="tx1"/>
+                </a:solidFill>
+              </a:ln>
+            </p:spPr>
+            <p:style>
+              <a:lnRef idx="1">
+                <a:schemeClr val="accent1"/>
+              </a:lnRef>
+              <a:fillRef idx="0">
+                <a:schemeClr val="accent1"/>
+              </a:fillRef>
+              <a:effectRef idx="0">
+                <a:schemeClr val="accent1"/>
+              </a:effectRef>
+              <a:fontRef idx="minor">
+                <a:schemeClr val="tx1"/>
+              </a:fontRef>
+            </p:style>
+          </p:cxnSp>
+          <p:cxnSp>
+            <p:nvCxnSpPr>
+              <p:cNvPr id="66" name="Conector recto 65"/>
+              <p:cNvCxnSpPr/>
+              <p:nvPr/>
+            </p:nvCxnSpPr>
+            <p:spPr>
+              <a:xfrm flipV="1">
+                <a:off x="8088230" y="446138"/>
+                <a:ext cx="0" cy="180000"/>
+              </a:xfrm>
+              <a:prstGeom prst="line">
+                <a:avLst/>
+              </a:prstGeom>
+              <a:ln>
+                <a:solidFill>
+                  <a:schemeClr val="tx1"/>
+                </a:solidFill>
+              </a:ln>
+            </p:spPr>
+            <p:style>
+              <a:lnRef idx="1">
+                <a:schemeClr val="accent1"/>
+              </a:lnRef>
+              <a:fillRef idx="0">
+                <a:schemeClr val="accent1"/>
+              </a:fillRef>
+              <a:effectRef idx="0">
+                <a:schemeClr val="accent1"/>
+              </a:effectRef>
+              <a:fontRef idx="minor">
+                <a:schemeClr val="tx1"/>
+              </a:fontRef>
+            </p:style>
+          </p:cxnSp>
+          <p:cxnSp>
+            <p:nvCxnSpPr>
+              <p:cNvPr id="67" name="Conector recto 66"/>
+              <p:cNvCxnSpPr/>
+              <p:nvPr/>
+            </p:nvCxnSpPr>
+            <p:spPr>
+              <a:xfrm>
+                <a:off x="8088230" y="446138"/>
+                <a:ext cx="179993" cy="0"/>
+              </a:xfrm>
+              <a:prstGeom prst="line">
+                <a:avLst/>
+              </a:prstGeom>
+              <a:ln>
+                <a:solidFill>
+                  <a:schemeClr val="tx1"/>
+                </a:solidFill>
+              </a:ln>
+            </p:spPr>
+            <p:style>
+              <a:lnRef idx="1">
+                <a:schemeClr val="accent1"/>
+              </a:lnRef>
+              <a:fillRef idx="0">
+                <a:schemeClr val="accent1"/>
+              </a:fillRef>
+              <a:effectRef idx="0">
+                <a:schemeClr val="accent1"/>
+              </a:effectRef>
+              <a:fontRef idx="minor">
+                <a:schemeClr val="tx1"/>
+              </a:fontRef>
+            </p:style>
+          </p:cxnSp>
+          <p:sp>
+            <p:nvSpPr>
+              <p:cNvPr id="88" name="CuadroTexto 87"/>
+              <p:cNvSpPr txBox="1"/>
+              <p:nvPr/>
+            </p:nvSpPr>
+            <p:spPr>
+              <a:xfrm>
+                <a:off x="6214828" y="1275750"/>
+                <a:ext cx="904415" cy="369332"/>
+              </a:xfrm>
+              <a:prstGeom prst="rect">
+                <a:avLst/>
+              </a:prstGeom>
+              <a:noFill/>
+            </p:spPr>
+            <p:txBody>
+              <a:bodyPr wrap="none" rtlCol="0">
+                <a:spAutoFit/>
+              </a:bodyPr>
+              <a:lstStyle/>
+              <a:p>
+                <a:r>
+                  <a:rPr lang="es-ES" dirty="0"/>
+                  <a:t>25 MHz</a:t>
+                </a:r>
+              </a:p>
+            </p:txBody>
+          </p:sp>
+          <p:cxnSp>
+            <p:nvCxnSpPr>
+              <p:cNvPr id="89" name="Conector recto de flecha 88"/>
+              <p:cNvCxnSpPr/>
+              <p:nvPr/>
+            </p:nvCxnSpPr>
+            <p:spPr>
+              <a:xfrm>
+                <a:off x="5066233" y="1232358"/>
+                <a:ext cx="0" cy="618543"/>
+              </a:xfrm>
+              <a:prstGeom prst="straightConnector1">
+                <a:avLst/>
+              </a:prstGeom>
+              <a:ln w="25400">
+                <a:solidFill>
+                  <a:schemeClr val="tx1"/>
+                </a:solidFill>
+                <a:tailEnd type="triangle" w="lg" len="lg"/>
+              </a:ln>
+            </p:spPr>
+            <p:style>
+              <a:lnRef idx="1">
+                <a:schemeClr val="accent1"/>
+              </a:lnRef>
+              <a:fillRef idx="0">
+                <a:schemeClr val="accent1"/>
+              </a:fillRef>
+              <a:effectRef idx="0">
+                <a:schemeClr val="accent1"/>
+              </a:effectRef>
+              <a:fontRef idx="minor">
+                <a:schemeClr val="tx1"/>
+              </a:fontRef>
+            </p:style>
+          </p:cxnSp>
+          <p:cxnSp>
+            <p:nvCxnSpPr>
+              <p:cNvPr id="90" name="Conector recto 89"/>
+              <p:cNvCxnSpPr/>
+              <p:nvPr/>
+            </p:nvCxnSpPr>
+            <p:spPr>
+              <a:xfrm>
+                <a:off x="5145396" y="1559506"/>
+                <a:ext cx="179993" cy="0"/>
+              </a:xfrm>
+              <a:prstGeom prst="line">
+                <a:avLst/>
+              </a:prstGeom>
+              <a:ln>
+                <a:solidFill>
+                  <a:schemeClr val="tx1"/>
+                </a:solidFill>
+              </a:ln>
+            </p:spPr>
+            <p:style>
+              <a:lnRef idx="1">
+                <a:schemeClr val="accent1"/>
+              </a:lnRef>
+              <a:fillRef idx="0">
+                <a:schemeClr val="accent1"/>
+              </a:fillRef>
+              <a:effectRef idx="0">
+                <a:schemeClr val="accent1"/>
+              </a:effectRef>
+              <a:fontRef idx="minor">
+                <a:schemeClr val="tx1"/>
+              </a:fontRef>
+            </p:style>
+          </p:cxnSp>
+          <p:cxnSp>
+            <p:nvCxnSpPr>
+              <p:cNvPr id="91" name="Conector recto 90"/>
+              <p:cNvCxnSpPr/>
+              <p:nvPr/>
+            </p:nvCxnSpPr>
+            <p:spPr>
+              <a:xfrm flipV="1">
+                <a:off x="5325389" y="1381705"/>
+                <a:ext cx="0" cy="180000"/>
+              </a:xfrm>
+              <a:prstGeom prst="line">
+                <a:avLst/>
+              </a:prstGeom>
+              <a:ln>
+                <a:solidFill>
+                  <a:schemeClr val="tx1"/>
+                </a:solidFill>
+              </a:ln>
+            </p:spPr>
+            <p:style>
+              <a:lnRef idx="1">
+                <a:schemeClr val="accent1"/>
+              </a:lnRef>
+              <a:fillRef idx="0">
+                <a:schemeClr val="accent1"/>
+              </a:fillRef>
+              <a:effectRef idx="0">
+                <a:schemeClr val="accent1"/>
+              </a:effectRef>
+              <a:fontRef idx="minor">
+                <a:schemeClr val="tx1"/>
+              </a:fontRef>
+            </p:style>
+          </p:cxnSp>
+          <p:cxnSp>
+            <p:nvCxnSpPr>
+              <p:cNvPr id="92" name="Conector recto 91"/>
+              <p:cNvCxnSpPr/>
+              <p:nvPr/>
+            </p:nvCxnSpPr>
+            <p:spPr>
+              <a:xfrm>
+                <a:off x="5325389" y="1381705"/>
+                <a:ext cx="179993" cy="0"/>
+              </a:xfrm>
+              <a:prstGeom prst="line">
+                <a:avLst/>
+              </a:prstGeom>
+              <a:ln>
+                <a:solidFill>
+                  <a:schemeClr val="tx1"/>
+                </a:solidFill>
+              </a:ln>
+            </p:spPr>
+            <p:style>
+              <a:lnRef idx="1">
+                <a:schemeClr val="accent1"/>
+              </a:lnRef>
+              <a:fillRef idx="0">
+                <a:schemeClr val="accent1"/>
+              </a:fillRef>
+              <a:effectRef idx="0">
+                <a:schemeClr val="accent1"/>
+              </a:effectRef>
+              <a:fontRef idx="minor">
+                <a:schemeClr val="tx1"/>
+              </a:fontRef>
+            </p:style>
+          </p:cxnSp>
+          <p:cxnSp>
+            <p:nvCxnSpPr>
+              <p:cNvPr id="93" name="Conector recto 92"/>
+              <p:cNvCxnSpPr/>
+              <p:nvPr/>
+            </p:nvCxnSpPr>
+            <p:spPr>
+              <a:xfrm flipV="1">
+                <a:off x="5505382" y="1379506"/>
+                <a:ext cx="0" cy="180000"/>
+              </a:xfrm>
+              <a:prstGeom prst="line">
+                <a:avLst/>
+              </a:prstGeom>
+              <a:ln>
+                <a:solidFill>
+                  <a:schemeClr val="tx1"/>
+                </a:solidFill>
+              </a:ln>
+            </p:spPr>
+            <p:style>
+              <a:lnRef idx="1">
+                <a:schemeClr val="accent1"/>
+              </a:lnRef>
+              <a:fillRef idx="0">
+                <a:schemeClr val="accent1"/>
+              </a:fillRef>
+              <a:effectRef idx="0">
+                <a:schemeClr val="accent1"/>
+              </a:effectRef>
+              <a:fontRef idx="minor">
+                <a:schemeClr val="tx1"/>
+              </a:fontRef>
+            </p:style>
+          </p:cxnSp>
+          <p:cxnSp>
+            <p:nvCxnSpPr>
+              <p:cNvPr id="94" name="Conector recto 93"/>
+              <p:cNvCxnSpPr/>
+              <p:nvPr/>
+            </p:nvCxnSpPr>
+            <p:spPr>
+              <a:xfrm>
+                <a:off x="5505382" y="1559506"/>
+                <a:ext cx="179993" cy="0"/>
+              </a:xfrm>
+              <a:prstGeom prst="line">
+                <a:avLst/>
+              </a:prstGeom>
+              <a:ln>
+                <a:solidFill>
+                  <a:schemeClr val="tx1"/>
+                </a:solidFill>
+              </a:ln>
+            </p:spPr>
+            <p:style>
+              <a:lnRef idx="1">
+                <a:schemeClr val="accent1"/>
+              </a:lnRef>
+              <a:fillRef idx="0">
+                <a:schemeClr val="accent1"/>
+              </a:fillRef>
+              <a:effectRef idx="0">
+                <a:schemeClr val="accent1"/>
+              </a:effectRef>
+              <a:fontRef idx="minor">
+                <a:schemeClr val="tx1"/>
+              </a:fontRef>
+            </p:style>
+          </p:cxnSp>
+          <p:cxnSp>
+            <p:nvCxnSpPr>
+              <p:cNvPr id="95" name="Conector recto 94"/>
+              <p:cNvCxnSpPr/>
+              <p:nvPr/>
+            </p:nvCxnSpPr>
+            <p:spPr>
+              <a:xfrm flipV="1">
+                <a:off x="5685375" y="1379506"/>
+                <a:ext cx="0" cy="180000"/>
+              </a:xfrm>
+              <a:prstGeom prst="line">
+                <a:avLst/>
+              </a:prstGeom>
+              <a:ln>
+                <a:solidFill>
+                  <a:schemeClr val="tx1"/>
+                </a:solidFill>
+              </a:ln>
+            </p:spPr>
+            <p:style>
+              <a:lnRef idx="1">
+                <a:schemeClr val="accent1"/>
+              </a:lnRef>
+              <a:fillRef idx="0">
+                <a:schemeClr val="accent1"/>
+              </a:fillRef>
+              <a:effectRef idx="0">
+                <a:schemeClr val="accent1"/>
+              </a:effectRef>
+              <a:fontRef idx="minor">
+                <a:schemeClr val="tx1"/>
+              </a:fontRef>
+            </p:style>
+          </p:cxnSp>
+          <p:cxnSp>
+            <p:nvCxnSpPr>
+              <p:cNvPr id="96" name="Conector recto 95"/>
+              <p:cNvCxnSpPr/>
+              <p:nvPr/>
+            </p:nvCxnSpPr>
+            <p:spPr>
+              <a:xfrm>
+                <a:off x="5685375" y="1379506"/>
+                <a:ext cx="179993" cy="0"/>
+              </a:xfrm>
+              <a:prstGeom prst="line">
+                <a:avLst/>
+              </a:prstGeom>
+              <a:ln>
+                <a:solidFill>
+                  <a:schemeClr val="tx1"/>
+                </a:solidFill>
+              </a:ln>
+            </p:spPr>
+            <p:style>
+              <a:lnRef idx="1">
+                <a:schemeClr val="accent1"/>
+              </a:lnRef>
+              <a:fillRef idx="0">
+                <a:schemeClr val="accent1"/>
+              </a:fillRef>
+              <a:effectRef idx="0">
+                <a:schemeClr val="accent1"/>
+              </a:effectRef>
+              <a:fontRef idx="minor">
+                <a:schemeClr val="tx1"/>
+              </a:fontRef>
+            </p:style>
+          </p:cxnSp>
+          <p:cxnSp>
+            <p:nvCxnSpPr>
+              <p:cNvPr id="97" name="Conector recto 96"/>
+              <p:cNvCxnSpPr/>
+              <p:nvPr/>
+            </p:nvCxnSpPr>
+            <p:spPr>
+              <a:xfrm flipV="1">
+                <a:off x="5864157" y="1379506"/>
+                <a:ext cx="0" cy="180000"/>
+              </a:xfrm>
+              <a:prstGeom prst="line">
+                <a:avLst/>
+              </a:prstGeom>
+              <a:ln>
+                <a:solidFill>
+                  <a:schemeClr val="tx1"/>
+                </a:solidFill>
+              </a:ln>
+            </p:spPr>
+            <p:style>
+              <a:lnRef idx="1">
+                <a:schemeClr val="accent1"/>
+              </a:lnRef>
+              <a:fillRef idx="0">
+                <a:schemeClr val="accent1"/>
+              </a:fillRef>
+              <a:effectRef idx="0">
+                <a:schemeClr val="accent1"/>
+              </a:effectRef>
+              <a:fontRef idx="minor">
+                <a:schemeClr val="tx1"/>
+              </a:fontRef>
+            </p:style>
+          </p:cxnSp>
+          <p:cxnSp>
+            <p:nvCxnSpPr>
+              <p:cNvPr id="98" name="Conector recto 97"/>
+              <p:cNvCxnSpPr/>
+              <p:nvPr/>
+            </p:nvCxnSpPr>
+            <p:spPr>
+              <a:xfrm>
+                <a:off x="5864157" y="1559506"/>
+                <a:ext cx="179993" cy="0"/>
+              </a:xfrm>
+              <a:prstGeom prst="line">
+                <a:avLst/>
+              </a:prstGeom>
+              <a:ln>
+                <a:solidFill>
+                  <a:schemeClr val="tx1"/>
+                </a:solidFill>
+              </a:ln>
+            </p:spPr>
+            <p:style>
+              <a:lnRef idx="1">
+                <a:schemeClr val="accent1"/>
+              </a:lnRef>
+              <a:fillRef idx="0">
+                <a:schemeClr val="accent1"/>
+              </a:fillRef>
+              <a:effectRef idx="0">
+                <a:schemeClr val="accent1"/>
+              </a:effectRef>
+              <a:fontRef idx="minor">
+                <a:schemeClr val="tx1"/>
+              </a:fontRef>
+            </p:style>
+          </p:cxnSp>
+          <p:cxnSp>
+            <p:nvCxnSpPr>
+              <p:cNvPr id="99" name="Conector recto 98"/>
+              <p:cNvCxnSpPr/>
+              <p:nvPr/>
+            </p:nvCxnSpPr>
+            <p:spPr>
+              <a:xfrm flipV="1">
+                <a:off x="6044150" y="1379506"/>
+                <a:ext cx="0" cy="180000"/>
+              </a:xfrm>
+              <a:prstGeom prst="line">
+                <a:avLst/>
+              </a:prstGeom>
+              <a:ln>
+                <a:solidFill>
+                  <a:schemeClr val="tx1"/>
+                </a:solidFill>
+              </a:ln>
+            </p:spPr>
+            <p:style>
+              <a:lnRef idx="1">
+                <a:schemeClr val="accent1"/>
+              </a:lnRef>
+              <a:fillRef idx="0">
+                <a:schemeClr val="accent1"/>
+              </a:fillRef>
+              <a:effectRef idx="0">
+                <a:schemeClr val="accent1"/>
+              </a:effectRef>
+              <a:fontRef idx="minor">
+                <a:schemeClr val="tx1"/>
+              </a:fontRef>
+            </p:style>
+          </p:cxnSp>
+          <p:cxnSp>
+            <p:nvCxnSpPr>
+              <p:cNvPr id="100" name="Conector recto 99"/>
+              <p:cNvCxnSpPr/>
+              <p:nvPr/>
+            </p:nvCxnSpPr>
+            <p:spPr>
+              <a:xfrm>
+                <a:off x="6044150" y="1379506"/>
+                <a:ext cx="179993" cy="0"/>
+              </a:xfrm>
+              <a:prstGeom prst="line">
+                <a:avLst/>
+              </a:prstGeom>
+              <a:ln>
+                <a:solidFill>
+                  <a:schemeClr val="tx1"/>
+                </a:solidFill>
+              </a:ln>
+            </p:spPr>
+            <p:style>
+              <a:lnRef idx="1">
+                <a:schemeClr val="accent1"/>
+              </a:lnRef>
+              <a:fillRef idx="0">
+                <a:schemeClr val="accent1"/>
+              </a:fillRef>
+              <a:effectRef idx="0">
+                <a:schemeClr val="accent1"/>
+              </a:effectRef>
+              <a:fontRef idx="minor">
+                <a:schemeClr val="tx1"/>
+              </a:fontRef>
+            </p:style>
+          </p:cxnSp>
+          <p:cxnSp>
+            <p:nvCxnSpPr>
+              <p:cNvPr id="68" name="Conector recto 67"/>
+              <p:cNvCxnSpPr/>
+              <p:nvPr/>
+            </p:nvCxnSpPr>
+            <p:spPr>
+              <a:xfrm>
+                <a:off x="6003212" y="2284411"/>
+                <a:ext cx="1287808" cy="0"/>
+              </a:xfrm>
+              <a:prstGeom prst="line">
+                <a:avLst/>
+              </a:prstGeom>
+              <a:ln w="25400">
+                <a:solidFill>
+                  <a:srgbClr val="221E7A"/>
+                </a:solidFill>
+              </a:ln>
+            </p:spPr>
+            <p:style>
+              <a:lnRef idx="1">
+                <a:schemeClr val="accent1"/>
+              </a:lnRef>
+              <a:fillRef idx="0">
+                <a:schemeClr val="accent1"/>
+              </a:fillRef>
+              <a:effectRef idx="0">
+                <a:schemeClr val="accent1"/>
+              </a:effectRef>
+              <a:fontRef idx="minor">
+                <a:schemeClr val="tx1"/>
+              </a:fontRef>
+            </p:style>
+          </p:cxnSp>
+          <p:cxnSp>
+            <p:nvCxnSpPr>
+              <p:cNvPr id="70" name="Conector recto 69"/>
+              <p:cNvCxnSpPr>
+                <a:cxnSpLocks/>
+              </p:cNvCxnSpPr>
+              <p:nvPr/>
+            </p:nvCxnSpPr>
+            <p:spPr>
+              <a:xfrm>
+                <a:off x="6003212" y="2285980"/>
+                <a:ext cx="0" cy="448508"/>
+              </a:xfrm>
+              <a:prstGeom prst="line">
+                <a:avLst/>
+              </a:prstGeom>
+              <a:ln w="25400">
+                <a:solidFill>
+                  <a:srgbClr val="221E7A"/>
+                </a:solidFill>
+              </a:ln>
+            </p:spPr>
+            <p:style>
+              <a:lnRef idx="1">
+                <a:schemeClr val="accent1"/>
+              </a:lnRef>
+              <a:fillRef idx="0">
+                <a:schemeClr val="accent1"/>
+              </a:fillRef>
+              <a:effectRef idx="0">
+                <a:schemeClr val="accent1"/>
+              </a:effectRef>
+              <a:fontRef idx="minor">
+                <a:schemeClr val="tx1"/>
+              </a:fontRef>
+            </p:style>
+          </p:cxnSp>
+          <p:sp>
+            <p:nvSpPr>
+              <p:cNvPr id="73" name="Rectángulo redondeado 72"/>
+              <p:cNvSpPr/>
+              <p:nvPr/>
+            </p:nvSpPr>
+            <p:spPr>
+              <a:xfrm>
+                <a:off x="7519620" y="2712552"/>
+                <a:ext cx="1360118" cy="426001"/>
+              </a:xfrm>
+              <a:prstGeom prst="roundRect">
+                <a:avLst/>
+              </a:prstGeom>
+              <a:solidFill>
+                <a:srgbClr val="FFFF99"/>
+              </a:solidFill>
+            </p:spPr>
+            <p:style>
+              <a:lnRef idx="2">
+                <a:schemeClr val="accent1">
+                  <a:shade val="50000"/>
+                </a:schemeClr>
+              </a:lnRef>
+              <a:fillRef idx="1">
+                <a:schemeClr val="accent1"/>
+              </a:fillRef>
+              <a:effectRef idx="0">
+                <a:schemeClr val="accent1"/>
+              </a:effectRef>
+              <a:fontRef idx="minor">
+                <a:schemeClr val="lt1"/>
+              </a:fontRef>
+            </p:style>
+            <p:txBody>
+              <a:bodyPr rtlCol="0" anchor="ctr"/>
+              <a:lstStyle/>
+              <a:p>
+                <a:pPr algn="ctr"/>
+                <a:r>
+                  <a:rPr lang="es-ES" sz="2000" b="1" dirty="0">
+                    <a:solidFill>
+                      <a:schemeClr val="tx1"/>
+                    </a:solidFill>
+                  </a:rPr>
+                  <a:t>CDC</a:t>
+                </a:r>
+              </a:p>
+            </p:txBody>
+          </p:sp>
+          <p:cxnSp>
+            <p:nvCxnSpPr>
+              <p:cNvPr id="87" name="Conector recto de flecha 86"/>
+              <p:cNvCxnSpPr/>
+              <p:nvPr/>
+            </p:nvCxnSpPr>
+            <p:spPr>
+              <a:xfrm flipH="1">
+                <a:off x="8720095" y="3661718"/>
+                <a:ext cx="1371419" cy="0"/>
+              </a:xfrm>
+              <a:prstGeom prst="straightConnector1">
+                <a:avLst/>
+              </a:prstGeom>
+              <a:ln w="25400">
+                <a:solidFill>
+                  <a:schemeClr val="tx1"/>
+                </a:solidFill>
+                <a:tailEnd type="triangle" w="lg" len="lg"/>
+              </a:ln>
+            </p:spPr>
+            <p:style>
+              <a:lnRef idx="1">
+                <a:schemeClr val="accent1"/>
+              </a:lnRef>
+              <a:fillRef idx="0">
+                <a:schemeClr val="accent1"/>
+              </a:fillRef>
+              <a:effectRef idx="0">
+                <a:schemeClr val="accent1"/>
+              </a:effectRef>
+              <a:fontRef idx="minor">
+                <a:schemeClr val="tx1"/>
+              </a:fontRef>
+            </p:style>
+          </p:cxnSp>
+          <p:cxnSp>
+            <p:nvCxnSpPr>
+              <p:cNvPr id="102" name="Conector recto de flecha 101"/>
+              <p:cNvCxnSpPr/>
+              <p:nvPr/>
+            </p:nvCxnSpPr>
+            <p:spPr>
+              <a:xfrm flipV="1">
+                <a:off x="10091513" y="918771"/>
+                <a:ext cx="1" cy="2735743"/>
+              </a:xfrm>
+              <a:prstGeom prst="straightConnector1">
+                <a:avLst/>
+              </a:prstGeom>
+              <a:ln w="25400">
+                <a:solidFill>
+                  <a:schemeClr val="tx1"/>
+                </a:solidFill>
+                <a:tailEnd type="none"/>
+              </a:ln>
+            </p:spPr>
+            <p:style>
+              <a:lnRef idx="1">
+                <a:schemeClr val="accent1"/>
+              </a:lnRef>
+              <a:fillRef idx="0">
+                <a:schemeClr val="accent1"/>
+              </a:fillRef>
+              <a:effectRef idx="0">
+                <a:schemeClr val="accent1"/>
+              </a:effectRef>
+              <a:fontRef idx="minor">
+                <a:schemeClr val="tx1"/>
+              </a:fontRef>
+            </p:style>
+          </p:cxnSp>
+          <p:cxnSp>
+            <p:nvCxnSpPr>
+              <p:cNvPr id="103" name="Conector recto de flecha 102"/>
+              <p:cNvCxnSpPr/>
+              <p:nvPr/>
+            </p:nvCxnSpPr>
+            <p:spPr>
+              <a:xfrm flipV="1">
+                <a:off x="7979538" y="720804"/>
+                <a:ext cx="0" cy="199978"/>
+              </a:xfrm>
+              <a:prstGeom prst="straightConnector1">
+                <a:avLst/>
+              </a:prstGeom>
+              <a:ln w="25400">
+                <a:solidFill>
+                  <a:schemeClr val="tx1"/>
+                </a:solidFill>
+                <a:tailEnd type="none"/>
+              </a:ln>
+            </p:spPr>
+            <p:style>
+              <a:lnRef idx="1">
+                <a:schemeClr val="accent1"/>
+              </a:lnRef>
+              <a:fillRef idx="0">
+                <a:schemeClr val="accent1"/>
+              </a:fillRef>
+              <a:effectRef idx="0">
+                <a:schemeClr val="accent1"/>
+              </a:effectRef>
+              <a:fontRef idx="minor">
+                <a:schemeClr val="tx1"/>
+              </a:fontRef>
+            </p:style>
+          </p:cxnSp>
+          <p:cxnSp>
+            <p:nvCxnSpPr>
+              <p:cNvPr id="104" name="Conector recto de flecha 103"/>
+              <p:cNvCxnSpPr/>
+              <p:nvPr/>
+            </p:nvCxnSpPr>
+            <p:spPr>
+              <a:xfrm flipV="1">
+                <a:off x="8171104" y="3138553"/>
+                <a:ext cx="0" cy="417803"/>
+              </a:xfrm>
+              <a:prstGeom prst="straightConnector1">
+                <a:avLst/>
+              </a:prstGeom>
+              <a:ln w="25400">
+                <a:solidFill>
+                  <a:schemeClr val="tx1"/>
+                </a:solidFill>
+                <a:headEnd type="triangle" w="lg" len="med"/>
+                <a:tailEnd type="triangle" w="lg" len="med"/>
+              </a:ln>
+            </p:spPr>
+            <p:style>
+              <a:lnRef idx="1">
+                <a:schemeClr val="accent1"/>
+              </a:lnRef>
+              <a:fillRef idx="0">
+                <a:schemeClr val="accent1"/>
+              </a:fillRef>
+              <a:effectRef idx="0">
+                <a:schemeClr val="accent1"/>
+              </a:effectRef>
+              <a:fontRef idx="minor">
+                <a:schemeClr val="tx1"/>
+              </a:fontRef>
+            </p:style>
+          </p:cxnSp>
+          <p:cxnSp>
+            <p:nvCxnSpPr>
+              <p:cNvPr id="105" name="Conector recto de flecha 104"/>
+              <p:cNvCxnSpPr/>
+              <p:nvPr/>
+            </p:nvCxnSpPr>
+            <p:spPr>
+              <a:xfrm flipH="1">
+                <a:off x="7114685" y="2933781"/>
+                <a:ext cx="400427" cy="0"/>
+              </a:xfrm>
+              <a:prstGeom prst="straightConnector1">
+                <a:avLst/>
+              </a:prstGeom>
+              <a:ln w="25400">
+                <a:solidFill>
+                  <a:schemeClr val="tx1"/>
+                </a:solidFill>
+                <a:headEnd type="triangle" w="lg" len="med"/>
+                <a:tailEnd type="triangle" w="lg" len="med"/>
+              </a:ln>
+            </p:spPr>
+            <p:style>
+              <a:lnRef idx="1">
+                <a:schemeClr val="accent1"/>
+              </a:lnRef>
+              <a:fillRef idx="0">
+                <a:schemeClr val="accent1"/>
+              </a:fillRef>
+              <a:effectRef idx="0">
+                <a:schemeClr val="accent1"/>
+              </a:effectRef>
+              <a:fontRef idx="minor">
+                <a:schemeClr val="tx1"/>
+              </a:fontRef>
+            </p:style>
+          </p:cxnSp>
+          <p:pic>
+            <p:nvPicPr>
+              <p:cNvPr id="2" name="Picture 1">
+                <a:extLst>
+                  <a:ext uri="{FF2B5EF4-FFF2-40B4-BE49-F238E27FC236}">
+                    <a16:creationId xmlns:a16="http://schemas.microsoft.com/office/drawing/2014/main" id="{5369682B-2BA4-5F6D-B4AB-FDBC250AB4AF}"/>
+                  </a:ext>
+                </a:extLst>
+              </p:cNvPr>
+              <p:cNvPicPr>
+                <a:picLocks noChangeAspect="1"/>
+              </p:cNvPicPr>
+              <p:nvPr/>
+            </p:nvPicPr>
+            <p:blipFill>
+              <a:blip r:embed="rId9" cstate="print">
+                <a:extLst>
+                  <a:ext uri="{28A0092B-C50C-407E-A947-70E740481C1C}">
+                    <a14:useLocalDpi xmlns:a14="http://schemas.microsoft.com/office/drawing/2010/main" val="0"/>
+                  </a:ext>
+                </a:extLst>
+              </a:blip>
+              <a:stretch>
+                <a:fillRect/>
+              </a:stretch>
+            </p:blipFill>
+            <p:spPr>
+              <a:xfrm>
+                <a:off x="3309655" y="1884639"/>
+                <a:ext cx="1821383" cy="1510230"/>
               </a:xfrm>
               <a:prstGeom prst="rect">
                 <a:avLst/>
@@ -5193,1661 +6875,12 @@
             </p:spPr>
           </p:pic>
         </p:grpSp>
-        <p:cxnSp>
-          <p:nvCxnSpPr>
-            <p:cNvPr id="40" name="Conector recto de flecha 39"/>
-            <p:cNvCxnSpPr/>
-            <p:nvPr/>
-          </p:nvCxnSpPr>
-          <p:spPr>
-            <a:xfrm flipV="1">
-              <a:off x="6003212" y="5324207"/>
-              <a:ext cx="1418" cy="822076"/>
-            </a:xfrm>
-            <a:prstGeom prst="straightConnector1">
-              <a:avLst/>
-            </a:prstGeom>
-            <a:ln w="25400">
-              <a:solidFill>
-                <a:schemeClr val="tx1"/>
-              </a:solidFill>
-              <a:headEnd type="triangle" w="lg" len="med"/>
-              <a:tailEnd type="triangle" w="lg" len="med"/>
-            </a:ln>
-          </p:spPr>
-          <p:style>
-            <a:lnRef idx="1">
-              <a:schemeClr val="accent1"/>
-            </a:lnRef>
-            <a:fillRef idx="0">
-              <a:schemeClr val="accent1"/>
-            </a:fillRef>
-            <a:effectRef idx="0">
-              <a:schemeClr val="accent1"/>
-            </a:effectRef>
-            <a:fontRef idx="minor">
-              <a:schemeClr val="tx1"/>
-            </a:fontRef>
-          </p:style>
-        </p:cxnSp>
         <p:pic>
           <p:nvPicPr>
-            <p:cNvPr id="50" name="Imagen 49"/>
-            <p:cNvPicPr>
-              <a:picLocks noChangeAspect="1"/>
-            </p:cNvPicPr>
-            <p:nvPr/>
-          </p:nvPicPr>
-          <p:blipFill>
-            <a:blip r:embed="rId6"/>
-            <a:stretch>
-              <a:fillRect/>
-            </a:stretch>
-          </p:blipFill>
-          <p:spPr>
-            <a:xfrm>
-              <a:off x="7156273" y="5016615"/>
-              <a:ext cx="616369" cy="430480"/>
-            </a:xfrm>
-            <a:prstGeom prst="rect">
-              <a:avLst/>
-            </a:prstGeom>
-          </p:spPr>
-        </p:pic>
-        <p:cxnSp>
-          <p:nvCxnSpPr>
-            <p:cNvPr id="54" name="Conector recto 53"/>
-            <p:cNvCxnSpPr/>
-            <p:nvPr/>
-          </p:nvCxnSpPr>
-          <p:spPr>
-            <a:xfrm>
-              <a:off x="7019435" y="5231855"/>
-              <a:ext cx="127313" cy="0"/>
-            </a:xfrm>
-            <a:prstGeom prst="line">
-              <a:avLst/>
-            </a:prstGeom>
-            <a:ln w="25400">
-              <a:solidFill>
-                <a:srgbClr val="221E7A"/>
-              </a:solidFill>
-            </a:ln>
-          </p:spPr>
-          <p:style>
-            <a:lnRef idx="1">
-              <a:schemeClr val="accent1"/>
-            </a:lnRef>
-            <a:fillRef idx="0">
-              <a:schemeClr val="accent1"/>
-            </a:fillRef>
-            <a:effectRef idx="0">
-              <a:schemeClr val="accent1"/>
-            </a:effectRef>
-            <a:fontRef idx="minor">
-              <a:schemeClr val="tx1"/>
-            </a:fontRef>
-          </p:style>
-        </p:cxnSp>
-        <p:pic>
-          <p:nvPicPr>
-            <p:cNvPr id="56" name="Imagen 55"/>
-            <p:cNvPicPr>
-              <a:picLocks noChangeAspect="1"/>
-            </p:cNvPicPr>
-            <p:nvPr/>
-          </p:nvPicPr>
-          <p:blipFill>
-            <a:blip r:embed="rId7"/>
-            <a:stretch>
-              <a:fillRect/>
-            </a:stretch>
-          </p:blipFill>
-          <p:spPr>
-            <a:xfrm>
-              <a:off x="9176718" y="3808433"/>
-              <a:ext cx="997269" cy="974750"/>
-            </a:xfrm>
-            <a:prstGeom prst="rect">
-              <a:avLst/>
-            </a:prstGeom>
-          </p:spPr>
-        </p:pic>
-        <p:sp>
-          <p:nvSpPr>
-            <p:cNvPr id="58" name="Rectángulo redondeado 57"/>
-            <p:cNvSpPr/>
-            <p:nvPr/>
-          </p:nvSpPr>
-          <p:spPr>
-            <a:xfrm>
-              <a:off x="7345786" y="3556356"/>
-              <a:ext cx="1374309" cy="619065"/>
-            </a:xfrm>
-            <a:prstGeom prst="roundRect">
-              <a:avLst/>
-            </a:prstGeom>
-            <a:solidFill>
-              <a:srgbClr val="FFFF99"/>
-            </a:solidFill>
-          </p:spPr>
-          <p:style>
-            <a:lnRef idx="2">
-              <a:schemeClr val="accent1">
-                <a:shade val="50000"/>
-              </a:schemeClr>
-            </a:lnRef>
-            <a:fillRef idx="1">
-              <a:schemeClr val="accent1"/>
-            </a:fillRef>
-            <a:effectRef idx="0">
-              <a:schemeClr val="accent1"/>
-            </a:effectRef>
-            <a:fontRef idx="minor">
-              <a:schemeClr val="lt1"/>
-            </a:fontRef>
-          </p:style>
-          <p:txBody>
-            <a:bodyPr rtlCol="0" anchor="ctr"/>
-            <a:lstStyle/>
-            <a:p>
-              <a:pPr algn="ctr"/>
-              <a:r>
-                <a:rPr lang="es-ES" sz="2000" b="1" dirty="0">
-                  <a:solidFill>
-                    <a:schemeClr val="tx1"/>
-                  </a:solidFill>
-                </a:rPr>
-                <a:t>Lite DRAM </a:t>
-              </a:r>
-              <a:r>
-                <a:rPr lang="es-ES" sz="2000" b="1" dirty="0" err="1">
-                  <a:solidFill>
-                    <a:schemeClr val="tx1"/>
-                  </a:solidFill>
-                </a:rPr>
-                <a:t>controller</a:t>
-              </a:r>
-              <a:endParaRPr lang="es-ES" sz="2000" b="1" dirty="0">
-                <a:solidFill>
-                  <a:schemeClr val="tx1"/>
-                </a:solidFill>
-              </a:endParaRPr>
-            </a:p>
-          </p:txBody>
-        </p:sp>
-        <p:sp>
-          <p:nvSpPr>
-            <p:cNvPr id="59" name="Flecha derecha 58"/>
-            <p:cNvSpPr/>
-            <p:nvPr/>
-          </p:nvSpPr>
-          <p:spPr>
-            <a:xfrm>
-              <a:off x="8762961" y="3975641"/>
-              <a:ext cx="348796" cy="184838"/>
-            </a:xfrm>
-            <a:prstGeom prst="rightArrow">
-              <a:avLst/>
-            </a:prstGeom>
-            <a:solidFill>
-              <a:schemeClr val="accent4">
-                <a:lumMod val="60000"/>
-                <a:lumOff val="40000"/>
-              </a:schemeClr>
-            </a:solidFill>
-          </p:spPr>
-          <p:style>
-            <a:lnRef idx="2">
-              <a:schemeClr val="accent1">
-                <a:shade val="50000"/>
-              </a:schemeClr>
-            </a:lnRef>
-            <a:fillRef idx="1">
-              <a:schemeClr val="accent1"/>
-            </a:fillRef>
-            <a:effectRef idx="0">
-              <a:schemeClr val="accent1"/>
-            </a:effectRef>
-            <a:fontRef idx="minor">
-              <a:schemeClr val="lt1"/>
-            </a:fontRef>
-          </p:style>
-          <p:txBody>
-            <a:bodyPr rtlCol="0" anchor="ctr"/>
-            <a:lstStyle/>
-            <a:p>
-              <a:pPr algn="ctr"/>
-              <a:endParaRPr lang="es-ES">
-                <a:solidFill>
-                  <a:schemeClr val="tx1"/>
-                </a:solidFill>
-              </a:endParaRPr>
-            </a:p>
-          </p:txBody>
-        </p:sp>
-        <p:pic>
-          <p:nvPicPr>
-            <p:cNvPr id="60" name="Imagen 59"/>
-            <p:cNvPicPr>
-              <a:picLocks noChangeAspect="1"/>
-            </p:cNvPicPr>
-            <p:nvPr/>
-          </p:nvPicPr>
-          <p:blipFill>
-            <a:blip r:embed="rId8"/>
-            <a:stretch>
-              <a:fillRect/>
-            </a:stretch>
-          </p:blipFill>
-          <p:spPr>
-            <a:xfrm>
-              <a:off x="3548436" y="5687818"/>
-              <a:ext cx="747359" cy="667640"/>
-            </a:xfrm>
-            <a:prstGeom prst="rect">
-              <a:avLst/>
-            </a:prstGeom>
-          </p:spPr>
-        </p:pic>
-        <p:sp>
-          <p:nvSpPr>
-            <p:cNvPr id="41" name="Rectángulo redondeado 40"/>
-            <p:cNvSpPr/>
-            <p:nvPr/>
-          </p:nvSpPr>
-          <p:spPr>
-            <a:xfrm>
-              <a:off x="7291020" y="2059939"/>
-              <a:ext cx="1360118" cy="426001"/>
-            </a:xfrm>
-            <a:prstGeom prst="roundRect">
-              <a:avLst/>
-            </a:prstGeom>
-            <a:solidFill>
-              <a:srgbClr val="FFFF99"/>
-            </a:solidFill>
-          </p:spPr>
-          <p:style>
-            <a:lnRef idx="2">
-              <a:schemeClr val="accent1">
-                <a:shade val="50000"/>
-              </a:schemeClr>
-            </a:lnRef>
-            <a:fillRef idx="1">
-              <a:schemeClr val="accent1"/>
-            </a:fillRef>
-            <a:effectRef idx="0">
-              <a:schemeClr val="accent1"/>
-            </a:effectRef>
-            <a:fontRef idx="minor">
-              <a:schemeClr val="lt1"/>
-            </a:fontRef>
-          </p:style>
-          <p:txBody>
-            <a:bodyPr rtlCol="0" anchor="ctr"/>
-            <a:lstStyle/>
-            <a:p>
-              <a:pPr algn="ctr"/>
-              <a:r>
-                <a:rPr lang="es-ES" sz="2000" b="1" dirty="0" err="1">
-                  <a:solidFill>
-                    <a:schemeClr val="tx1"/>
-                  </a:solidFill>
-                </a:rPr>
-                <a:t>bscan</a:t>
-              </a:r>
-              <a:r>
-                <a:rPr lang="es-ES" sz="2000" b="1" dirty="0">
-                  <a:solidFill>
-                    <a:schemeClr val="tx1"/>
-                  </a:solidFill>
-                </a:rPr>
-                <a:t> TAP</a:t>
-              </a:r>
-            </a:p>
-          </p:txBody>
-        </p:sp>
-        <p:cxnSp>
-          <p:nvCxnSpPr>
-            <p:cNvPr id="49" name="Conector recto 48"/>
-            <p:cNvCxnSpPr/>
-            <p:nvPr/>
-          </p:nvCxnSpPr>
-          <p:spPr>
-            <a:xfrm>
-              <a:off x="5215158" y="2734488"/>
-              <a:ext cx="788054" cy="0"/>
-            </a:xfrm>
-            <a:prstGeom prst="line">
-              <a:avLst/>
-            </a:prstGeom>
-            <a:ln w="25400">
-              <a:solidFill>
-                <a:srgbClr val="221E7A"/>
-              </a:solidFill>
-            </a:ln>
-          </p:spPr>
-          <p:style>
-            <a:lnRef idx="1">
-              <a:schemeClr val="accent1"/>
-            </a:lnRef>
-            <a:fillRef idx="0">
-              <a:schemeClr val="accent1"/>
-            </a:fillRef>
-            <a:effectRef idx="0">
-              <a:schemeClr val="accent1"/>
-            </a:effectRef>
-            <a:fontRef idx="minor">
-              <a:schemeClr val="tx1"/>
-            </a:fontRef>
-          </p:style>
-        </p:cxnSp>
-        <p:pic>
-          <p:nvPicPr>
-            <p:cNvPr id="51" name="Imagen 50"/>
-            <p:cNvPicPr>
-              <a:picLocks noChangeAspect="1"/>
-            </p:cNvPicPr>
-            <p:nvPr/>
-          </p:nvPicPr>
-          <p:blipFill>
-            <a:blip r:embed="rId9"/>
-            <a:stretch>
-              <a:fillRect/>
-            </a:stretch>
-          </p:blipFill>
-          <p:spPr>
-            <a:xfrm>
-              <a:off x="7753592" y="4828967"/>
-              <a:ext cx="1020374" cy="799427"/>
-            </a:xfrm>
-            <a:prstGeom prst="rect">
-              <a:avLst/>
-            </a:prstGeom>
-          </p:spPr>
-        </p:pic>
-        <p:sp>
-          <p:nvSpPr>
-            <p:cNvPr id="42" name="Rectángulo redondeado 41"/>
-            <p:cNvSpPr/>
-            <p:nvPr/>
-          </p:nvSpPr>
-          <p:spPr>
-            <a:xfrm>
-              <a:off x="4615618" y="611292"/>
-              <a:ext cx="1360118" cy="621066"/>
-            </a:xfrm>
-            <a:prstGeom prst="roundRect">
-              <a:avLst/>
-            </a:prstGeom>
-            <a:solidFill>
-              <a:srgbClr val="FFFF99"/>
-            </a:solidFill>
-          </p:spPr>
-          <p:style>
-            <a:lnRef idx="2">
-              <a:schemeClr val="accent1">
-                <a:shade val="50000"/>
-              </a:schemeClr>
-            </a:lnRef>
-            <a:fillRef idx="1">
-              <a:schemeClr val="accent1"/>
-            </a:fillRef>
-            <a:effectRef idx="0">
-              <a:schemeClr val="accent1"/>
-            </a:effectRef>
-            <a:fontRef idx="minor">
-              <a:schemeClr val="lt1"/>
-            </a:fontRef>
-          </p:style>
-          <p:txBody>
-            <a:bodyPr rtlCol="0" anchor="ctr"/>
-            <a:lstStyle/>
-            <a:p>
-              <a:pPr algn="ctr"/>
-              <a:r>
-                <a:rPr lang="es-ES" sz="2000" b="1" dirty="0" err="1">
-                  <a:solidFill>
-                    <a:schemeClr val="tx1"/>
-                  </a:solidFill>
-                </a:rPr>
-                <a:t>Clock</a:t>
-              </a:r>
-              <a:r>
-                <a:rPr lang="es-ES" sz="2000" b="1" dirty="0">
-                  <a:solidFill>
-                    <a:schemeClr val="tx1"/>
-                  </a:solidFill>
-                </a:rPr>
-                <a:t> </a:t>
-              </a:r>
-              <a:r>
-                <a:rPr lang="es-ES" sz="2000" b="1" dirty="0" err="1">
-                  <a:solidFill>
-                    <a:schemeClr val="tx1"/>
-                  </a:solidFill>
-                </a:rPr>
-                <a:t>Generator</a:t>
-              </a:r>
-              <a:endParaRPr lang="es-ES" sz="2000" b="1" dirty="0">
-                <a:solidFill>
-                  <a:schemeClr val="tx1"/>
-                </a:solidFill>
-              </a:endParaRPr>
-            </a:p>
-          </p:txBody>
-        </p:sp>
-        <p:cxnSp>
-          <p:nvCxnSpPr>
-            <p:cNvPr id="23" name="Conector recto de flecha 22"/>
-            <p:cNvCxnSpPr/>
-            <p:nvPr/>
-          </p:nvCxnSpPr>
-          <p:spPr>
-            <a:xfrm flipH="1">
-              <a:off x="5963653" y="921825"/>
-              <a:ext cx="4127860" cy="0"/>
-            </a:xfrm>
-            <a:prstGeom prst="straightConnector1">
-              <a:avLst/>
-            </a:prstGeom>
-            <a:ln w="25400">
-              <a:solidFill>
-                <a:schemeClr val="tx1"/>
-              </a:solidFill>
-              <a:tailEnd type="triangle" w="lg" len="lg"/>
-            </a:ln>
-          </p:spPr>
-          <p:style>
-            <a:lnRef idx="1">
-              <a:schemeClr val="accent1"/>
-            </a:lnRef>
-            <a:fillRef idx="0">
-              <a:schemeClr val="accent1"/>
-            </a:fillRef>
-            <a:effectRef idx="0">
-              <a:schemeClr val="accent1"/>
-            </a:effectRef>
-            <a:fontRef idx="minor">
-              <a:schemeClr val="tx1"/>
-            </a:fontRef>
-          </p:style>
-        </p:cxnSp>
-        <p:sp>
-          <p:nvSpPr>
-            <p:cNvPr id="25" name="CuadroTexto 24"/>
-            <p:cNvSpPr txBox="1"/>
-            <p:nvPr/>
-          </p:nvSpPr>
-          <p:spPr>
-            <a:xfrm>
-              <a:off x="8267011" y="351472"/>
-              <a:ext cx="1021433" cy="369332"/>
-            </a:xfrm>
-            <a:prstGeom prst="rect">
-              <a:avLst/>
-            </a:prstGeom>
-            <a:noFill/>
-          </p:spPr>
-          <p:txBody>
-            <a:bodyPr wrap="none" rtlCol="0">
-              <a:spAutoFit/>
-            </a:bodyPr>
-            <a:lstStyle/>
-            <a:p>
-              <a:r>
-                <a:rPr lang="es-ES" dirty="0"/>
-                <a:t>100 MHz</a:t>
-              </a:r>
-            </a:p>
-          </p:txBody>
-        </p:sp>
-        <p:cxnSp>
-          <p:nvCxnSpPr>
-            <p:cNvPr id="28" name="Conector recto 27"/>
-            <p:cNvCxnSpPr/>
-            <p:nvPr/>
-          </p:nvCxnSpPr>
-          <p:spPr>
-            <a:xfrm>
-              <a:off x="7189476" y="626138"/>
-              <a:ext cx="179993" cy="0"/>
-            </a:xfrm>
-            <a:prstGeom prst="line">
-              <a:avLst/>
-            </a:prstGeom>
-            <a:ln>
-              <a:solidFill>
-                <a:schemeClr val="tx1"/>
-              </a:solidFill>
-            </a:ln>
-          </p:spPr>
-          <p:style>
-            <a:lnRef idx="1">
-              <a:schemeClr val="accent1"/>
-            </a:lnRef>
-            <a:fillRef idx="0">
-              <a:schemeClr val="accent1"/>
-            </a:fillRef>
-            <a:effectRef idx="0">
-              <a:schemeClr val="accent1"/>
-            </a:effectRef>
-            <a:fontRef idx="minor">
-              <a:schemeClr val="tx1"/>
-            </a:fontRef>
-          </p:style>
-        </p:cxnSp>
-        <p:cxnSp>
-          <p:nvCxnSpPr>
-            <p:cNvPr id="47" name="Conector recto 46"/>
-            <p:cNvCxnSpPr/>
-            <p:nvPr/>
-          </p:nvCxnSpPr>
-          <p:spPr>
-            <a:xfrm flipV="1">
-              <a:off x="7369469" y="448337"/>
-              <a:ext cx="0" cy="180000"/>
-            </a:xfrm>
-            <a:prstGeom prst="line">
-              <a:avLst/>
-            </a:prstGeom>
-            <a:ln>
-              <a:solidFill>
-                <a:schemeClr val="tx1"/>
-              </a:solidFill>
-            </a:ln>
-          </p:spPr>
-          <p:style>
-            <a:lnRef idx="1">
-              <a:schemeClr val="accent1"/>
-            </a:lnRef>
-            <a:fillRef idx="0">
-              <a:schemeClr val="accent1"/>
-            </a:fillRef>
-            <a:effectRef idx="0">
-              <a:schemeClr val="accent1"/>
-            </a:effectRef>
-            <a:fontRef idx="minor">
-              <a:schemeClr val="tx1"/>
-            </a:fontRef>
-          </p:style>
-        </p:cxnSp>
-        <p:cxnSp>
-          <p:nvCxnSpPr>
-            <p:cNvPr id="52" name="Conector recto 51"/>
-            <p:cNvCxnSpPr/>
-            <p:nvPr/>
-          </p:nvCxnSpPr>
-          <p:spPr>
-            <a:xfrm>
-              <a:off x="7369469" y="448337"/>
-              <a:ext cx="179993" cy="0"/>
-            </a:xfrm>
-            <a:prstGeom prst="line">
-              <a:avLst/>
-            </a:prstGeom>
-            <a:ln>
-              <a:solidFill>
-                <a:schemeClr val="tx1"/>
-              </a:solidFill>
-            </a:ln>
-          </p:spPr>
-          <p:style>
-            <a:lnRef idx="1">
-              <a:schemeClr val="accent1"/>
-            </a:lnRef>
-            <a:fillRef idx="0">
-              <a:schemeClr val="accent1"/>
-            </a:fillRef>
-            <a:effectRef idx="0">
-              <a:schemeClr val="accent1"/>
-            </a:effectRef>
-            <a:fontRef idx="minor">
-              <a:schemeClr val="tx1"/>
-            </a:fontRef>
-          </p:style>
-        </p:cxnSp>
-        <p:cxnSp>
-          <p:nvCxnSpPr>
-            <p:cNvPr id="55" name="Conector recto 54"/>
-            <p:cNvCxnSpPr/>
-            <p:nvPr/>
-          </p:nvCxnSpPr>
-          <p:spPr>
-            <a:xfrm flipV="1">
-              <a:off x="7549462" y="446138"/>
-              <a:ext cx="0" cy="180000"/>
-            </a:xfrm>
-            <a:prstGeom prst="line">
-              <a:avLst/>
-            </a:prstGeom>
-            <a:ln>
-              <a:solidFill>
-                <a:schemeClr val="tx1"/>
-              </a:solidFill>
-            </a:ln>
-          </p:spPr>
-          <p:style>
-            <a:lnRef idx="1">
-              <a:schemeClr val="accent1"/>
-            </a:lnRef>
-            <a:fillRef idx="0">
-              <a:schemeClr val="accent1"/>
-            </a:fillRef>
-            <a:effectRef idx="0">
-              <a:schemeClr val="accent1"/>
-            </a:effectRef>
-            <a:fontRef idx="minor">
-              <a:schemeClr val="tx1"/>
-            </a:fontRef>
-          </p:style>
-        </p:cxnSp>
-        <p:cxnSp>
-          <p:nvCxnSpPr>
-            <p:cNvPr id="61" name="Conector recto 60"/>
-            <p:cNvCxnSpPr/>
-            <p:nvPr/>
-          </p:nvCxnSpPr>
-          <p:spPr>
-            <a:xfrm>
-              <a:off x="7549462" y="626138"/>
-              <a:ext cx="179993" cy="0"/>
-            </a:xfrm>
-            <a:prstGeom prst="line">
-              <a:avLst/>
-            </a:prstGeom>
-            <a:ln>
-              <a:solidFill>
-                <a:schemeClr val="tx1"/>
-              </a:solidFill>
-            </a:ln>
-          </p:spPr>
-          <p:style>
-            <a:lnRef idx="1">
-              <a:schemeClr val="accent1"/>
-            </a:lnRef>
-            <a:fillRef idx="0">
-              <a:schemeClr val="accent1"/>
-            </a:fillRef>
-            <a:effectRef idx="0">
-              <a:schemeClr val="accent1"/>
-            </a:effectRef>
-            <a:fontRef idx="minor">
-              <a:schemeClr val="tx1"/>
-            </a:fontRef>
-          </p:style>
-        </p:cxnSp>
-        <p:cxnSp>
-          <p:nvCxnSpPr>
-            <p:cNvPr id="62" name="Conector recto 61"/>
-            <p:cNvCxnSpPr/>
-            <p:nvPr/>
-          </p:nvCxnSpPr>
-          <p:spPr>
-            <a:xfrm flipV="1">
-              <a:off x="7729455" y="446138"/>
-              <a:ext cx="0" cy="180000"/>
-            </a:xfrm>
-            <a:prstGeom prst="line">
-              <a:avLst/>
-            </a:prstGeom>
-            <a:ln>
-              <a:solidFill>
-                <a:schemeClr val="tx1"/>
-              </a:solidFill>
-            </a:ln>
-          </p:spPr>
-          <p:style>
-            <a:lnRef idx="1">
-              <a:schemeClr val="accent1"/>
-            </a:lnRef>
-            <a:fillRef idx="0">
-              <a:schemeClr val="accent1"/>
-            </a:fillRef>
-            <a:effectRef idx="0">
-              <a:schemeClr val="accent1"/>
-            </a:effectRef>
-            <a:fontRef idx="minor">
-              <a:schemeClr val="tx1"/>
-            </a:fontRef>
-          </p:style>
-        </p:cxnSp>
-        <p:cxnSp>
-          <p:nvCxnSpPr>
-            <p:cNvPr id="63" name="Conector recto 62"/>
-            <p:cNvCxnSpPr/>
-            <p:nvPr/>
-          </p:nvCxnSpPr>
-          <p:spPr>
-            <a:xfrm>
-              <a:off x="7729455" y="446138"/>
-              <a:ext cx="179993" cy="0"/>
-            </a:xfrm>
-            <a:prstGeom prst="line">
-              <a:avLst/>
-            </a:prstGeom>
-            <a:ln>
-              <a:solidFill>
-                <a:schemeClr val="tx1"/>
-              </a:solidFill>
-            </a:ln>
-          </p:spPr>
-          <p:style>
-            <a:lnRef idx="1">
-              <a:schemeClr val="accent1"/>
-            </a:lnRef>
-            <a:fillRef idx="0">
-              <a:schemeClr val="accent1"/>
-            </a:fillRef>
-            <a:effectRef idx="0">
-              <a:schemeClr val="accent1"/>
-            </a:effectRef>
-            <a:fontRef idx="minor">
-              <a:schemeClr val="tx1"/>
-            </a:fontRef>
-          </p:style>
-        </p:cxnSp>
-        <p:cxnSp>
-          <p:nvCxnSpPr>
-            <p:cNvPr id="64" name="Conector recto 63"/>
-            <p:cNvCxnSpPr/>
-            <p:nvPr/>
-          </p:nvCxnSpPr>
-          <p:spPr>
-            <a:xfrm flipV="1">
-              <a:off x="7908237" y="446138"/>
-              <a:ext cx="0" cy="180000"/>
-            </a:xfrm>
-            <a:prstGeom prst="line">
-              <a:avLst/>
-            </a:prstGeom>
-            <a:ln>
-              <a:solidFill>
-                <a:schemeClr val="tx1"/>
-              </a:solidFill>
-            </a:ln>
-          </p:spPr>
-          <p:style>
-            <a:lnRef idx="1">
-              <a:schemeClr val="accent1"/>
-            </a:lnRef>
-            <a:fillRef idx="0">
-              <a:schemeClr val="accent1"/>
-            </a:fillRef>
-            <a:effectRef idx="0">
-              <a:schemeClr val="accent1"/>
-            </a:effectRef>
-            <a:fontRef idx="minor">
-              <a:schemeClr val="tx1"/>
-            </a:fontRef>
-          </p:style>
-        </p:cxnSp>
-        <p:cxnSp>
-          <p:nvCxnSpPr>
-            <p:cNvPr id="65" name="Conector recto 64"/>
-            <p:cNvCxnSpPr/>
-            <p:nvPr/>
-          </p:nvCxnSpPr>
-          <p:spPr>
-            <a:xfrm>
-              <a:off x="7908237" y="626138"/>
-              <a:ext cx="179993" cy="0"/>
-            </a:xfrm>
-            <a:prstGeom prst="line">
-              <a:avLst/>
-            </a:prstGeom>
-            <a:ln>
-              <a:solidFill>
-                <a:schemeClr val="tx1"/>
-              </a:solidFill>
-            </a:ln>
-          </p:spPr>
-          <p:style>
-            <a:lnRef idx="1">
-              <a:schemeClr val="accent1"/>
-            </a:lnRef>
-            <a:fillRef idx="0">
-              <a:schemeClr val="accent1"/>
-            </a:fillRef>
-            <a:effectRef idx="0">
-              <a:schemeClr val="accent1"/>
-            </a:effectRef>
-            <a:fontRef idx="minor">
-              <a:schemeClr val="tx1"/>
-            </a:fontRef>
-          </p:style>
-        </p:cxnSp>
-        <p:cxnSp>
-          <p:nvCxnSpPr>
-            <p:cNvPr id="66" name="Conector recto 65"/>
-            <p:cNvCxnSpPr/>
-            <p:nvPr/>
-          </p:nvCxnSpPr>
-          <p:spPr>
-            <a:xfrm flipV="1">
-              <a:off x="8088230" y="446138"/>
-              <a:ext cx="0" cy="180000"/>
-            </a:xfrm>
-            <a:prstGeom prst="line">
-              <a:avLst/>
-            </a:prstGeom>
-            <a:ln>
-              <a:solidFill>
-                <a:schemeClr val="tx1"/>
-              </a:solidFill>
-            </a:ln>
-          </p:spPr>
-          <p:style>
-            <a:lnRef idx="1">
-              <a:schemeClr val="accent1"/>
-            </a:lnRef>
-            <a:fillRef idx="0">
-              <a:schemeClr val="accent1"/>
-            </a:fillRef>
-            <a:effectRef idx="0">
-              <a:schemeClr val="accent1"/>
-            </a:effectRef>
-            <a:fontRef idx="minor">
-              <a:schemeClr val="tx1"/>
-            </a:fontRef>
-          </p:style>
-        </p:cxnSp>
-        <p:cxnSp>
-          <p:nvCxnSpPr>
-            <p:cNvPr id="67" name="Conector recto 66"/>
-            <p:cNvCxnSpPr/>
-            <p:nvPr/>
-          </p:nvCxnSpPr>
-          <p:spPr>
-            <a:xfrm>
-              <a:off x="8088230" y="446138"/>
-              <a:ext cx="179993" cy="0"/>
-            </a:xfrm>
-            <a:prstGeom prst="line">
-              <a:avLst/>
-            </a:prstGeom>
-            <a:ln>
-              <a:solidFill>
-                <a:schemeClr val="tx1"/>
-              </a:solidFill>
-            </a:ln>
-          </p:spPr>
-          <p:style>
-            <a:lnRef idx="1">
-              <a:schemeClr val="accent1"/>
-            </a:lnRef>
-            <a:fillRef idx="0">
-              <a:schemeClr val="accent1"/>
-            </a:fillRef>
-            <a:effectRef idx="0">
-              <a:schemeClr val="accent1"/>
-            </a:effectRef>
-            <a:fontRef idx="minor">
-              <a:schemeClr val="tx1"/>
-            </a:fontRef>
-          </p:style>
-        </p:cxnSp>
-        <p:sp>
-          <p:nvSpPr>
-            <p:cNvPr id="88" name="CuadroTexto 87"/>
-            <p:cNvSpPr txBox="1"/>
-            <p:nvPr/>
-          </p:nvSpPr>
-          <p:spPr>
-            <a:xfrm>
-              <a:off x="6214828" y="1275750"/>
-              <a:ext cx="904415" cy="369332"/>
-            </a:xfrm>
-            <a:prstGeom prst="rect">
-              <a:avLst/>
-            </a:prstGeom>
-            <a:noFill/>
-          </p:spPr>
-          <p:txBody>
-            <a:bodyPr wrap="none" rtlCol="0">
-              <a:spAutoFit/>
-            </a:bodyPr>
-            <a:lstStyle/>
-            <a:p>
-              <a:r>
-                <a:rPr lang="es-ES" dirty="0"/>
-                <a:t>25 MHz</a:t>
-              </a:r>
-            </a:p>
-          </p:txBody>
-        </p:sp>
-        <p:cxnSp>
-          <p:nvCxnSpPr>
-            <p:cNvPr id="89" name="Conector recto de flecha 88"/>
-            <p:cNvCxnSpPr/>
-            <p:nvPr/>
-          </p:nvCxnSpPr>
-          <p:spPr>
-            <a:xfrm>
-              <a:off x="5066233" y="1232358"/>
-              <a:ext cx="0" cy="618543"/>
-            </a:xfrm>
-            <a:prstGeom prst="straightConnector1">
-              <a:avLst/>
-            </a:prstGeom>
-            <a:ln w="25400">
-              <a:solidFill>
-                <a:schemeClr val="tx1"/>
-              </a:solidFill>
-              <a:tailEnd type="triangle" w="lg" len="lg"/>
-            </a:ln>
-          </p:spPr>
-          <p:style>
-            <a:lnRef idx="1">
-              <a:schemeClr val="accent1"/>
-            </a:lnRef>
-            <a:fillRef idx="0">
-              <a:schemeClr val="accent1"/>
-            </a:fillRef>
-            <a:effectRef idx="0">
-              <a:schemeClr val="accent1"/>
-            </a:effectRef>
-            <a:fontRef idx="minor">
-              <a:schemeClr val="tx1"/>
-            </a:fontRef>
-          </p:style>
-        </p:cxnSp>
-        <p:cxnSp>
-          <p:nvCxnSpPr>
-            <p:cNvPr id="90" name="Conector recto 89"/>
-            <p:cNvCxnSpPr/>
-            <p:nvPr/>
-          </p:nvCxnSpPr>
-          <p:spPr>
-            <a:xfrm>
-              <a:off x="5145396" y="1559506"/>
-              <a:ext cx="179993" cy="0"/>
-            </a:xfrm>
-            <a:prstGeom prst="line">
-              <a:avLst/>
-            </a:prstGeom>
-            <a:ln>
-              <a:solidFill>
-                <a:schemeClr val="tx1"/>
-              </a:solidFill>
-            </a:ln>
-          </p:spPr>
-          <p:style>
-            <a:lnRef idx="1">
-              <a:schemeClr val="accent1"/>
-            </a:lnRef>
-            <a:fillRef idx="0">
-              <a:schemeClr val="accent1"/>
-            </a:fillRef>
-            <a:effectRef idx="0">
-              <a:schemeClr val="accent1"/>
-            </a:effectRef>
-            <a:fontRef idx="minor">
-              <a:schemeClr val="tx1"/>
-            </a:fontRef>
-          </p:style>
-        </p:cxnSp>
-        <p:cxnSp>
-          <p:nvCxnSpPr>
-            <p:cNvPr id="91" name="Conector recto 90"/>
-            <p:cNvCxnSpPr/>
-            <p:nvPr/>
-          </p:nvCxnSpPr>
-          <p:spPr>
-            <a:xfrm flipV="1">
-              <a:off x="5325389" y="1381705"/>
-              <a:ext cx="0" cy="180000"/>
-            </a:xfrm>
-            <a:prstGeom prst="line">
-              <a:avLst/>
-            </a:prstGeom>
-            <a:ln>
-              <a:solidFill>
-                <a:schemeClr val="tx1"/>
-              </a:solidFill>
-            </a:ln>
-          </p:spPr>
-          <p:style>
-            <a:lnRef idx="1">
-              <a:schemeClr val="accent1"/>
-            </a:lnRef>
-            <a:fillRef idx="0">
-              <a:schemeClr val="accent1"/>
-            </a:fillRef>
-            <a:effectRef idx="0">
-              <a:schemeClr val="accent1"/>
-            </a:effectRef>
-            <a:fontRef idx="minor">
-              <a:schemeClr val="tx1"/>
-            </a:fontRef>
-          </p:style>
-        </p:cxnSp>
-        <p:cxnSp>
-          <p:nvCxnSpPr>
-            <p:cNvPr id="92" name="Conector recto 91"/>
-            <p:cNvCxnSpPr/>
-            <p:nvPr/>
-          </p:nvCxnSpPr>
-          <p:spPr>
-            <a:xfrm>
-              <a:off x="5325389" y="1381705"/>
-              <a:ext cx="179993" cy="0"/>
-            </a:xfrm>
-            <a:prstGeom prst="line">
-              <a:avLst/>
-            </a:prstGeom>
-            <a:ln>
-              <a:solidFill>
-                <a:schemeClr val="tx1"/>
-              </a:solidFill>
-            </a:ln>
-          </p:spPr>
-          <p:style>
-            <a:lnRef idx="1">
-              <a:schemeClr val="accent1"/>
-            </a:lnRef>
-            <a:fillRef idx="0">
-              <a:schemeClr val="accent1"/>
-            </a:fillRef>
-            <a:effectRef idx="0">
-              <a:schemeClr val="accent1"/>
-            </a:effectRef>
-            <a:fontRef idx="minor">
-              <a:schemeClr val="tx1"/>
-            </a:fontRef>
-          </p:style>
-        </p:cxnSp>
-        <p:cxnSp>
-          <p:nvCxnSpPr>
-            <p:cNvPr id="93" name="Conector recto 92"/>
-            <p:cNvCxnSpPr/>
-            <p:nvPr/>
-          </p:nvCxnSpPr>
-          <p:spPr>
-            <a:xfrm flipV="1">
-              <a:off x="5505382" y="1379506"/>
-              <a:ext cx="0" cy="180000"/>
-            </a:xfrm>
-            <a:prstGeom prst="line">
-              <a:avLst/>
-            </a:prstGeom>
-            <a:ln>
-              <a:solidFill>
-                <a:schemeClr val="tx1"/>
-              </a:solidFill>
-            </a:ln>
-          </p:spPr>
-          <p:style>
-            <a:lnRef idx="1">
-              <a:schemeClr val="accent1"/>
-            </a:lnRef>
-            <a:fillRef idx="0">
-              <a:schemeClr val="accent1"/>
-            </a:fillRef>
-            <a:effectRef idx="0">
-              <a:schemeClr val="accent1"/>
-            </a:effectRef>
-            <a:fontRef idx="minor">
-              <a:schemeClr val="tx1"/>
-            </a:fontRef>
-          </p:style>
-        </p:cxnSp>
-        <p:cxnSp>
-          <p:nvCxnSpPr>
-            <p:cNvPr id="94" name="Conector recto 93"/>
-            <p:cNvCxnSpPr/>
-            <p:nvPr/>
-          </p:nvCxnSpPr>
-          <p:spPr>
-            <a:xfrm>
-              <a:off x="5505382" y="1559506"/>
-              <a:ext cx="179993" cy="0"/>
-            </a:xfrm>
-            <a:prstGeom prst="line">
-              <a:avLst/>
-            </a:prstGeom>
-            <a:ln>
-              <a:solidFill>
-                <a:schemeClr val="tx1"/>
-              </a:solidFill>
-            </a:ln>
-          </p:spPr>
-          <p:style>
-            <a:lnRef idx="1">
-              <a:schemeClr val="accent1"/>
-            </a:lnRef>
-            <a:fillRef idx="0">
-              <a:schemeClr val="accent1"/>
-            </a:fillRef>
-            <a:effectRef idx="0">
-              <a:schemeClr val="accent1"/>
-            </a:effectRef>
-            <a:fontRef idx="minor">
-              <a:schemeClr val="tx1"/>
-            </a:fontRef>
-          </p:style>
-        </p:cxnSp>
-        <p:cxnSp>
-          <p:nvCxnSpPr>
-            <p:cNvPr id="95" name="Conector recto 94"/>
-            <p:cNvCxnSpPr/>
-            <p:nvPr/>
-          </p:nvCxnSpPr>
-          <p:spPr>
-            <a:xfrm flipV="1">
-              <a:off x="5685375" y="1379506"/>
-              <a:ext cx="0" cy="180000"/>
-            </a:xfrm>
-            <a:prstGeom prst="line">
-              <a:avLst/>
-            </a:prstGeom>
-            <a:ln>
-              <a:solidFill>
-                <a:schemeClr val="tx1"/>
-              </a:solidFill>
-            </a:ln>
-          </p:spPr>
-          <p:style>
-            <a:lnRef idx="1">
-              <a:schemeClr val="accent1"/>
-            </a:lnRef>
-            <a:fillRef idx="0">
-              <a:schemeClr val="accent1"/>
-            </a:fillRef>
-            <a:effectRef idx="0">
-              <a:schemeClr val="accent1"/>
-            </a:effectRef>
-            <a:fontRef idx="minor">
-              <a:schemeClr val="tx1"/>
-            </a:fontRef>
-          </p:style>
-        </p:cxnSp>
-        <p:cxnSp>
-          <p:nvCxnSpPr>
-            <p:cNvPr id="96" name="Conector recto 95"/>
-            <p:cNvCxnSpPr/>
-            <p:nvPr/>
-          </p:nvCxnSpPr>
-          <p:spPr>
-            <a:xfrm>
-              <a:off x="5685375" y="1379506"/>
-              <a:ext cx="179993" cy="0"/>
-            </a:xfrm>
-            <a:prstGeom prst="line">
-              <a:avLst/>
-            </a:prstGeom>
-            <a:ln>
-              <a:solidFill>
-                <a:schemeClr val="tx1"/>
-              </a:solidFill>
-            </a:ln>
-          </p:spPr>
-          <p:style>
-            <a:lnRef idx="1">
-              <a:schemeClr val="accent1"/>
-            </a:lnRef>
-            <a:fillRef idx="0">
-              <a:schemeClr val="accent1"/>
-            </a:fillRef>
-            <a:effectRef idx="0">
-              <a:schemeClr val="accent1"/>
-            </a:effectRef>
-            <a:fontRef idx="minor">
-              <a:schemeClr val="tx1"/>
-            </a:fontRef>
-          </p:style>
-        </p:cxnSp>
-        <p:cxnSp>
-          <p:nvCxnSpPr>
-            <p:cNvPr id="97" name="Conector recto 96"/>
-            <p:cNvCxnSpPr/>
-            <p:nvPr/>
-          </p:nvCxnSpPr>
-          <p:spPr>
-            <a:xfrm flipV="1">
-              <a:off x="5864157" y="1379506"/>
-              <a:ext cx="0" cy="180000"/>
-            </a:xfrm>
-            <a:prstGeom prst="line">
-              <a:avLst/>
-            </a:prstGeom>
-            <a:ln>
-              <a:solidFill>
-                <a:schemeClr val="tx1"/>
-              </a:solidFill>
-            </a:ln>
-          </p:spPr>
-          <p:style>
-            <a:lnRef idx="1">
-              <a:schemeClr val="accent1"/>
-            </a:lnRef>
-            <a:fillRef idx="0">
-              <a:schemeClr val="accent1"/>
-            </a:fillRef>
-            <a:effectRef idx="0">
-              <a:schemeClr val="accent1"/>
-            </a:effectRef>
-            <a:fontRef idx="minor">
-              <a:schemeClr val="tx1"/>
-            </a:fontRef>
-          </p:style>
-        </p:cxnSp>
-        <p:cxnSp>
-          <p:nvCxnSpPr>
-            <p:cNvPr id="98" name="Conector recto 97"/>
-            <p:cNvCxnSpPr/>
-            <p:nvPr/>
-          </p:nvCxnSpPr>
-          <p:spPr>
-            <a:xfrm>
-              <a:off x="5864157" y="1559506"/>
-              <a:ext cx="179993" cy="0"/>
-            </a:xfrm>
-            <a:prstGeom prst="line">
-              <a:avLst/>
-            </a:prstGeom>
-            <a:ln>
-              <a:solidFill>
-                <a:schemeClr val="tx1"/>
-              </a:solidFill>
-            </a:ln>
-          </p:spPr>
-          <p:style>
-            <a:lnRef idx="1">
-              <a:schemeClr val="accent1"/>
-            </a:lnRef>
-            <a:fillRef idx="0">
-              <a:schemeClr val="accent1"/>
-            </a:fillRef>
-            <a:effectRef idx="0">
-              <a:schemeClr val="accent1"/>
-            </a:effectRef>
-            <a:fontRef idx="minor">
-              <a:schemeClr val="tx1"/>
-            </a:fontRef>
-          </p:style>
-        </p:cxnSp>
-        <p:cxnSp>
-          <p:nvCxnSpPr>
-            <p:cNvPr id="99" name="Conector recto 98"/>
-            <p:cNvCxnSpPr/>
-            <p:nvPr/>
-          </p:nvCxnSpPr>
-          <p:spPr>
-            <a:xfrm flipV="1">
-              <a:off x="6044150" y="1379506"/>
-              <a:ext cx="0" cy="180000"/>
-            </a:xfrm>
-            <a:prstGeom prst="line">
-              <a:avLst/>
-            </a:prstGeom>
-            <a:ln>
-              <a:solidFill>
-                <a:schemeClr val="tx1"/>
-              </a:solidFill>
-            </a:ln>
-          </p:spPr>
-          <p:style>
-            <a:lnRef idx="1">
-              <a:schemeClr val="accent1"/>
-            </a:lnRef>
-            <a:fillRef idx="0">
-              <a:schemeClr val="accent1"/>
-            </a:fillRef>
-            <a:effectRef idx="0">
-              <a:schemeClr val="accent1"/>
-            </a:effectRef>
-            <a:fontRef idx="minor">
-              <a:schemeClr val="tx1"/>
-            </a:fontRef>
-          </p:style>
-        </p:cxnSp>
-        <p:cxnSp>
-          <p:nvCxnSpPr>
-            <p:cNvPr id="100" name="Conector recto 99"/>
-            <p:cNvCxnSpPr/>
-            <p:nvPr/>
-          </p:nvCxnSpPr>
-          <p:spPr>
-            <a:xfrm>
-              <a:off x="6044150" y="1379506"/>
-              <a:ext cx="179993" cy="0"/>
-            </a:xfrm>
-            <a:prstGeom prst="line">
-              <a:avLst/>
-            </a:prstGeom>
-            <a:ln>
-              <a:solidFill>
-                <a:schemeClr val="tx1"/>
-              </a:solidFill>
-            </a:ln>
-          </p:spPr>
-          <p:style>
-            <a:lnRef idx="1">
-              <a:schemeClr val="accent1"/>
-            </a:lnRef>
-            <a:fillRef idx="0">
-              <a:schemeClr val="accent1"/>
-            </a:fillRef>
-            <a:effectRef idx="0">
-              <a:schemeClr val="accent1"/>
-            </a:effectRef>
-            <a:fontRef idx="minor">
-              <a:schemeClr val="tx1"/>
-            </a:fontRef>
-          </p:style>
-        </p:cxnSp>
-        <p:cxnSp>
-          <p:nvCxnSpPr>
-            <p:cNvPr id="68" name="Conector recto 67"/>
-            <p:cNvCxnSpPr/>
-            <p:nvPr/>
-          </p:nvCxnSpPr>
-          <p:spPr>
-            <a:xfrm>
-              <a:off x="6003212" y="2284411"/>
-              <a:ext cx="1287808" cy="0"/>
-            </a:xfrm>
-            <a:prstGeom prst="line">
-              <a:avLst/>
-            </a:prstGeom>
-            <a:ln w="25400">
-              <a:solidFill>
-                <a:srgbClr val="221E7A"/>
-              </a:solidFill>
-            </a:ln>
-          </p:spPr>
-          <p:style>
-            <a:lnRef idx="1">
-              <a:schemeClr val="accent1"/>
-            </a:lnRef>
-            <a:fillRef idx="0">
-              <a:schemeClr val="accent1"/>
-            </a:fillRef>
-            <a:effectRef idx="0">
-              <a:schemeClr val="accent1"/>
-            </a:effectRef>
-            <a:fontRef idx="minor">
-              <a:schemeClr val="tx1"/>
-            </a:fontRef>
-          </p:style>
-        </p:cxnSp>
-        <p:cxnSp>
-          <p:nvCxnSpPr>
-            <p:cNvPr id="70" name="Conector recto 69"/>
-            <p:cNvCxnSpPr>
-              <a:cxnSpLocks/>
-            </p:cNvCxnSpPr>
-            <p:nvPr/>
-          </p:nvCxnSpPr>
-          <p:spPr>
-            <a:xfrm>
-              <a:off x="6003212" y="2285980"/>
-              <a:ext cx="0" cy="448508"/>
-            </a:xfrm>
-            <a:prstGeom prst="line">
-              <a:avLst/>
-            </a:prstGeom>
-            <a:ln w="25400">
-              <a:solidFill>
-                <a:srgbClr val="221E7A"/>
-              </a:solidFill>
-            </a:ln>
-          </p:spPr>
-          <p:style>
-            <a:lnRef idx="1">
-              <a:schemeClr val="accent1"/>
-            </a:lnRef>
-            <a:fillRef idx="0">
-              <a:schemeClr val="accent1"/>
-            </a:fillRef>
-            <a:effectRef idx="0">
-              <a:schemeClr val="accent1"/>
-            </a:effectRef>
-            <a:fontRef idx="minor">
-              <a:schemeClr val="tx1"/>
-            </a:fontRef>
-          </p:style>
-        </p:cxnSp>
-        <p:sp>
-          <p:nvSpPr>
-            <p:cNvPr id="73" name="Rectángulo redondeado 72"/>
-            <p:cNvSpPr/>
-            <p:nvPr/>
-          </p:nvSpPr>
-          <p:spPr>
-            <a:xfrm>
-              <a:off x="7519620" y="2712552"/>
-              <a:ext cx="1360118" cy="426001"/>
-            </a:xfrm>
-            <a:prstGeom prst="roundRect">
-              <a:avLst/>
-            </a:prstGeom>
-            <a:solidFill>
-              <a:srgbClr val="FFFF99"/>
-            </a:solidFill>
-          </p:spPr>
-          <p:style>
-            <a:lnRef idx="2">
-              <a:schemeClr val="accent1">
-                <a:shade val="50000"/>
-              </a:schemeClr>
-            </a:lnRef>
-            <a:fillRef idx="1">
-              <a:schemeClr val="accent1"/>
-            </a:fillRef>
-            <a:effectRef idx="0">
-              <a:schemeClr val="accent1"/>
-            </a:effectRef>
-            <a:fontRef idx="minor">
-              <a:schemeClr val="lt1"/>
-            </a:fontRef>
-          </p:style>
-          <p:txBody>
-            <a:bodyPr rtlCol="0" anchor="ctr"/>
-            <a:lstStyle/>
-            <a:p>
-              <a:pPr algn="ctr"/>
-              <a:r>
-                <a:rPr lang="es-ES" sz="2000" b="1" dirty="0">
-                  <a:solidFill>
-                    <a:schemeClr val="tx1"/>
-                  </a:solidFill>
-                </a:rPr>
-                <a:t>CDC</a:t>
-              </a:r>
-            </a:p>
-          </p:txBody>
-        </p:sp>
-        <p:cxnSp>
-          <p:nvCxnSpPr>
-            <p:cNvPr id="87" name="Conector recto de flecha 86"/>
-            <p:cNvCxnSpPr/>
-            <p:nvPr/>
-          </p:nvCxnSpPr>
-          <p:spPr>
-            <a:xfrm flipH="1">
-              <a:off x="8720095" y="3661718"/>
-              <a:ext cx="1371419" cy="0"/>
-            </a:xfrm>
-            <a:prstGeom prst="straightConnector1">
-              <a:avLst/>
-            </a:prstGeom>
-            <a:ln w="25400">
-              <a:solidFill>
-                <a:schemeClr val="tx1"/>
-              </a:solidFill>
-              <a:tailEnd type="triangle" w="lg" len="lg"/>
-            </a:ln>
-          </p:spPr>
-          <p:style>
-            <a:lnRef idx="1">
-              <a:schemeClr val="accent1"/>
-            </a:lnRef>
-            <a:fillRef idx="0">
-              <a:schemeClr val="accent1"/>
-            </a:fillRef>
-            <a:effectRef idx="0">
-              <a:schemeClr val="accent1"/>
-            </a:effectRef>
-            <a:fontRef idx="minor">
-              <a:schemeClr val="tx1"/>
-            </a:fontRef>
-          </p:style>
-        </p:cxnSp>
-        <p:cxnSp>
-          <p:nvCxnSpPr>
-            <p:cNvPr id="102" name="Conector recto de flecha 101"/>
-            <p:cNvCxnSpPr/>
-            <p:nvPr/>
-          </p:nvCxnSpPr>
-          <p:spPr>
-            <a:xfrm flipV="1">
-              <a:off x="10091513" y="918771"/>
-              <a:ext cx="1" cy="2735743"/>
-            </a:xfrm>
-            <a:prstGeom prst="straightConnector1">
-              <a:avLst/>
-            </a:prstGeom>
-            <a:ln w="25400">
-              <a:solidFill>
-                <a:schemeClr val="tx1"/>
-              </a:solidFill>
-              <a:tailEnd type="none"/>
-            </a:ln>
-          </p:spPr>
-          <p:style>
-            <a:lnRef idx="1">
-              <a:schemeClr val="accent1"/>
-            </a:lnRef>
-            <a:fillRef idx="0">
-              <a:schemeClr val="accent1"/>
-            </a:fillRef>
-            <a:effectRef idx="0">
-              <a:schemeClr val="accent1"/>
-            </a:effectRef>
-            <a:fontRef idx="minor">
-              <a:schemeClr val="tx1"/>
-            </a:fontRef>
-          </p:style>
-        </p:cxnSp>
-        <p:cxnSp>
-          <p:nvCxnSpPr>
-            <p:cNvPr id="103" name="Conector recto de flecha 102"/>
-            <p:cNvCxnSpPr/>
-            <p:nvPr/>
-          </p:nvCxnSpPr>
-          <p:spPr>
-            <a:xfrm flipV="1">
-              <a:off x="7979538" y="720804"/>
-              <a:ext cx="0" cy="199978"/>
-            </a:xfrm>
-            <a:prstGeom prst="straightConnector1">
-              <a:avLst/>
-            </a:prstGeom>
-            <a:ln w="25400">
-              <a:solidFill>
-                <a:schemeClr val="tx1"/>
-              </a:solidFill>
-              <a:tailEnd type="none"/>
-            </a:ln>
-          </p:spPr>
-          <p:style>
-            <a:lnRef idx="1">
-              <a:schemeClr val="accent1"/>
-            </a:lnRef>
-            <a:fillRef idx="0">
-              <a:schemeClr val="accent1"/>
-            </a:fillRef>
-            <a:effectRef idx="0">
-              <a:schemeClr val="accent1"/>
-            </a:effectRef>
-            <a:fontRef idx="minor">
-              <a:schemeClr val="tx1"/>
-            </a:fontRef>
-          </p:style>
-        </p:cxnSp>
-        <p:cxnSp>
-          <p:nvCxnSpPr>
-            <p:cNvPr id="104" name="Conector recto de flecha 103"/>
-            <p:cNvCxnSpPr/>
-            <p:nvPr/>
-          </p:nvCxnSpPr>
-          <p:spPr>
-            <a:xfrm flipV="1">
-              <a:off x="8171104" y="3138553"/>
-              <a:ext cx="0" cy="417803"/>
-            </a:xfrm>
-            <a:prstGeom prst="straightConnector1">
-              <a:avLst/>
-            </a:prstGeom>
-            <a:ln w="25400">
-              <a:solidFill>
-                <a:schemeClr val="tx1"/>
-              </a:solidFill>
-              <a:headEnd type="triangle" w="lg" len="med"/>
-              <a:tailEnd type="triangle" w="lg" len="med"/>
-            </a:ln>
-          </p:spPr>
-          <p:style>
-            <a:lnRef idx="1">
-              <a:schemeClr val="accent1"/>
-            </a:lnRef>
-            <a:fillRef idx="0">
-              <a:schemeClr val="accent1"/>
-            </a:fillRef>
-            <a:effectRef idx="0">
-              <a:schemeClr val="accent1"/>
-            </a:effectRef>
-            <a:fontRef idx="minor">
-              <a:schemeClr val="tx1"/>
-            </a:fontRef>
-          </p:style>
-        </p:cxnSp>
-        <p:cxnSp>
-          <p:nvCxnSpPr>
-            <p:cNvPr id="105" name="Conector recto de flecha 104"/>
-            <p:cNvCxnSpPr/>
-            <p:nvPr/>
-          </p:nvCxnSpPr>
-          <p:spPr>
-            <a:xfrm flipH="1">
-              <a:off x="7114685" y="2933781"/>
-              <a:ext cx="400427" cy="0"/>
-            </a:xfrm>
-            <a:prstGeom prst="straightConnector1">
-              <a:avLst/>
-            </a:prstGeom>
-            <a:ln w="25400">
-              <a:solidFill>
-                <a:schemeClr val="tx1"/>
-              </a:solidFill>
-              <a:headEnd type="triangle" w="lg" len="med"/>
-              <a:tailEnd type="triangle" w="lg" len="med"/>
-            </a:ln>
-          </p:spPr>
-          <p:style>
-            <a:lnRef idx="1">
-              <a:schemeClr val="accent1"/>
-            </a:lnRef>
-            <a:fillRef idx="0">
-              <a:schemeClr val="accent1"/>
-            </a:fillRef>
-            <a:effectRef idx="0">
-              <a:schemeClr val="accent1"/>
-            </a:effectRef>
-            <a:fontRef idx="minor">
-              <a:schemeClr val="tx1"/>
-            </a:fontRef>
-          </p:style>
-        </p:cxnSp>
-        <p:pic>
-          <p:nvPicPr>
-            <p:cNvPr id="2" name="Picture 1">
+            <p:cNvPr id="7" name="图片 6" descr="图片包含 游戏机, 电子, 电路&#10;&#10;AI 生成的内容可能不正确。">
               <a:extLst>
                 <a:ext uri="{FF2B5EF4-FFF2-40B4-BE49-F238E27FC236}">
-                  <a16:creationId xmlns:a16="http://schemas.microsoft.com/office/drawing/2014/main" id="{5369682B-2BA4-5F6D-B4AB-FDBC250AB4AF}"/>
+                  <a16:creationId xmlns:a16="http://schemas.microsoft.com/office/drawing/2014/main" id="{9BBD90CA-6799-8E26-B9AE-734741DAC88E}"/>
                 </a:ext>
               </a:extLst>
             </p:cNvPr>
@@ -6857,21 +6890,22 @@
             <p:nvPr/>
           </p:nvPicPr>
           <p:blipFill>
-            <a:blip r:embed="rId10" cstate="print">
+            <a:blip r:embed="rId10">
               <a:extLst>
                 <a:ext uri="{28A0092B-C50C-407E-A947-70E740481C1C}">
                   <a14:useLocalDpi xmlns:a14="http://schemas.microsoft.com/office/drawing/2010/main" val="0"/>
                 </a:ext>
               </a:extLst>
             </a:blip>
+            <a:srcRect l="38510" t="66106" r="41013" b="24332"/>
             <a:stretch>
               <a:fillRect/>
             </a:stretch>
           </p:blipFill>
           <p:spPr>
             <a:xfrm>
-              <a:off x="3309655" y="1884639"/>
-              <a:ext cx="1821383" cy="1510230"/>
+              <a:off x="4193991" y="6153024"/>
+              <a:ext cx="899090" cy="380642"/>
             </a:xfrm>
             <a:prstGeom prst="rect">
               <a:avLst/>
